--- a/exports/pptx/lessons/primary-module-09-subtraction-nikhilam/day-03-magic-word.pptx
+++ b/exports/pptx/lessons/primary-module-09-subtraction-nikhilam/day-03-magic-word.pptx
@@ -16,9 +16,10 @@
     <p:sldId id="264" r:id="rId10"/>
     <p:sldId id="265" r:id="rId11"/>
     <p:sldId id="266" r:id="rId12"/>
+    <p:sldId id="267" r:id="rId13"/>
   </p:sldIdLst>
   <p:notesMasterIdLst>
-    <p:notesMasterId r:id="rId13"/>
+    <p:notesMasterId r:id="rId14"/>
   </p:notesMasterIdLst>
   <p:sldSz cx="9144000" cy="5143500"/>
   <p:notesSz cx="5143500" cy="9144000"/>
@@ -712,6 +713,94 @@
             <a:fld id="{F7021451-1387-4CA6-816F-3879F97B5CBC}" type="slidenum">
               <a:rPr lang="en-US"/>
               <a:t>11</a:t>
+            </a:fld>
+            <a:endParaRPr lang="en-US"/>
+          </a:p>
+        </p:txBody>
+      </p:sp>
+    </p:spTree>
+    <p:extLst>
+      <p:ext uri="{BB962C8B-B14F-4D97-AF65-F5344CB8AC3E}">
+        <p14:creationId xmlns:p14="http://schemas.microsoft.com/office/powerpoint/2010/main" val="1024086991"/>
+      </p:ext>
+    </p:extLst>
+  </p:cSld>
+  <p:clrMapOvr>
+    <a:masterClrMapping/>
+  </p:clrMapOvr>
+</p:notes>
+</file>
+
+<file path=ppt/notesSlides/notesSlide12.xml><?xml version="1.0" encoding="utf-8"?>
+<p:notes xmlns:a="http://schemas.openxmlformats.org/drawingml/2006/main" xmlns:r="http://schemas.openxmlformats.org/officeDocument/2006/relationships" xmlns:p="http://schemas.openxmlformats.org/presentationml/2006/main">
+  <p:cSld>
+    <p:spTree>
+      <p:nvGrpSpPr>
+        <p:cNvPr id="1" name=""/>
+        <p:cNvGrpSpPr/>
+        <p:nvPr/>
+      </p:nvGrpSpPr>
+      <p:grpSpPr>
+        <a:xfrm>
+          <a:off x="0" y="0"/>
+          <a:ext cx="0" cy="0"/>
+          <a:chOff x="0" y="0"/>
+          <a:chExt cx="0" cy="0"/>
+        </a:xfrm>
+      </p:grpSpPr>
+      <p:sp>
+        <p:nvSpPr>
+          <p:cNvPr id="2" name="Slide Image Placeholder 1"/>
+          <p:cNvSpPr>
+            <a:spLocks noGrp="1" noRot="1" noChangeAspect="1"/>
+          </p:cNvSpPr>
+          <p:nvPr>
+            <p:ph type="sldImg"/>
+          </p:nvPr>
+        </p:nvSpPr>
+        <p:spPr/>
+      </p:sp>
+      <p:sp>
+        <p:nvSpPr>
+          <p:cNvPr id="3" name="Notes Placeholder 2"/>
+          <p:cNvSpPr>
+            <a:spLocks noGrp="1"/>
+          </p:cNvSpPr>
+          <p:nvPr>
+            <p:ph type="body" idx="1"/>
+          </p:nvPr>
+        </p:nvSpPr>
+        <p:spPr/>
+        <p:txBody>
+          <a:bodyPr/>
+          <a:lstStyle/>
+          <a:p>
+            <a:r>
+              <a:rPr lang="en-US" dirty="0"/>
+              <a:t/>
+            </a:r>
+            <a:endParaRPr lang="en-US" dirty="0"/>
+          </a:p>
+        </p:txBody>
+      </p:sp>
+      <p:sp>
+        <p:nvSpPr>
+          <p:cNvPr id="4" name="Slide Number Placeholder 3"/>
+          <p:cNvSpPr>
+            <a:spLocks noGrp="1"/>
+          </p:cNvSpPr>
+          <p:nvPr>
+            <p:ph type="sldNum" sz="quarter" idx="10"/>
+          </p:nvPr>
+        </p:nvSpPr>
+        <p:spPr/>
+        <p:txBody>
+          <a:bodyPr/>
+          <a:lstStyle/>
+          <a:p>
+            <a:fld id="{F7021451-1387-4CA6-816F-3879F97B5CBC}" type="slidenum">
+              <a:rPr lang="en-US"/>
+              <a:t>12</a:t>
             </a:fld>
             <a:endParaRPr lang="en-US"/>
           </a:p>
@@ -1965,148 +2054,6 @@
         </p:nvSpPr>
         <p:spPr>
           <a:xfrm>
-            <a:off x="406301" y="1223963"/>
-            <a:ext cx="8498026" cy="274290"/>
-          </a:xfrm>
-          <a:prstGeom prst="rect">
-            <a:avLst/>
-          </a:prstGeom>
-          <a:noFill/>
-          <a:ln/>
-        </p:spPr>
-        <p:txBody>
-          <a:bodyPr wrap="square" lIns="0" tIns="0" rIns="0" bIns="0" rtlCol="0" anchor="t"/>
-          <a:lstStyle/>
-          <a:p>
-            <a:pPr algn="l" indent="0" marL="0">
-              <a:lnSpc>
-                <a:spcPts val="2160"/>
-              </a:lnSpc>
-              <a:spcBef>
-                <a:spcPts val="600"/>
-              </a:spcBef>
-              <a:spcAft>
-                <a:spcPts val="800"/>
-              </a:spcAft>
-              <a:buNone/>
-            </a:pPr>
-            <a:r>
-              <a:rPr lang="en-US" sz="1800" b="1" dirty="0">
-                <a:solidFill>
-                  <a:srgbClr val="E07A5F"/>
-                </a:solidFill>
-                <a:latin typeface="Georgia" pitchFamily="34" charset="0"/>
-                <a:ea typeface="Georgia" pitchFamily="34" charset="-122"/>
-                <a:cs typeface="Georgia" pitchFamily="34" charset="-120"/>
-              </a:rPr>
-              <a:t>Goal</a:t>
-            </a:r>
-            <a:endParaRPr lang="en-US" sz="1800" dirty="0"/>
-          </a:p>
-        </p:txBody>
-      </p:sp>
-      <p:sp>
-        <p:nvSpPr>
-          <p:cNvPr id="6" name="Text 4"/>
-          <p:cNvSpPr/>
-          <p:nvPr/>
-        </p:nvSpPr>
-        <p:spPr>
-          <a:xfrm>
-            <a:off x="406301" y="1637854"/>
-            <a:ext cx="8498026" cy="426541"/>
-          </a:xfrm>
-          <a:prstGeom prst="rect">
-            <a:avLst/>
-          </a:prstGeom>
-          <a:noFill/>
-          <a:ln/>
-        </p:spPr>
-        <p:txBody>
-          <a:bodyPr wrap="square" lIns="0" tIns="0" rIns="0" bIns="0" rtlCol="0" anchor="t"/>
-          <a:lstStyle/>
-          <a:p>
-            <a:pPr algn="l" indent="0" marL="0">
-              <a:lnSpc>
-                <a:spcPts val="1680"/>
-              </a:lnSpc>
-              <a:spcBef>
-                <a:spcPts val="300"/>
-              </a:spcBef>
-              <a:spcAft>
-                <a:spcPts val="300"/>
-              </a:spcAft>
-              <a:buNone/>
-            </a:pPr>
-            <a:r>
-              <a:rPr lang="en-US" sz="1200" dirty="0">
-                <a:solidFill>
-                  <a:srgbClr val="2C2C2C"/>
-                </a:solidFill>
-                <a:latin typeface="Verdana" pitchFamily="34" charset="0"/>
-                <a:ea typeface="Verdana" pitchFamily="34" charset="-122"/>
-                <a:cs typeface="Verdana" pitchFamily="34" charset="-120"/>
-              </a:rPr>
-              <a:t>Children meet the Sanskrit word </a:t>
-            </a:r>
-            <a:pPr algn="l" indent="0" marL="0">
-              <a:lnSpc>
-                <a:spcPts val="1680"/>
-              </a:lnSpc>
-              <a:spcBef>
-                <a:spcPts val="300"/>
-              </a:spcBef>
-              <a:spcAft>
-                <a:spcPts val="300"/>
-              </a:spcAft>
-              <a:buNone/>
-            </a:pPr>
-            <a:r>
-              <a:rPr lang="en-US" sz="1200" i="1" dirty="0">
-                <a:solidFill>
-                  <a:srgbClr val="2C2C2C"/>
-                </a:solidFill>
-                <a:latin typeface="Verdana" pitchFamily="34" charset="0"/>
-                <a:ea typeface="Verdana" pitchFamily="34" charset="-122"/>
-                <a:cs typeface="Verdana" pitchFamily="34" charset="-120"/>
-              </a:rPr>
-              <a:t>Nikhilam</a:t>
-            </a:r>
-            <a:pPr algn="l" indent="0" marL="0">
-              <a:lnSpc>
-                <a:spcPts val="1680"/>
-              </a:lnSpc>
-              <a:spcBef>
-                <a:spcPts val="300"/>
-              </a:spcBef>
-              <a:spcAft>
-                <a:spcPts val="300"/>
-              </a:spcAft>
-              <a:buNone/>
-            </a:pPr>
-            <a:r>
-              <a:rPr lang="en-US" sz="1200" dirty="0">
-                <a:solidFill>
-                  <a:srgbClr val="2C2C2C"/>
-                </a:solidFill>
-                <a:latin typeface="Verdana" pitchFamily="34" charset="0"/>
-                <a:ea typeface="Verdana" pitchFamily="34" charset="-122"/>
-                <a:cs typeface="Verdana" pitchFamily="34" charset="-120"/>
-              </a:rPr>
-              <a:t>. They learn to pronounce it, recognise the wall poster, and connect it to "friends to ten."</a:t>
-            </a:r>
-            <a:endParaRPr lang="en-US" sz="1200" dirty="0"/>
-          </a:p>
-        </p:txBody>
-      </p:sp>
-      <p:sp>
-        <p:nvSpPr>
-          <p:cNvPr id="7" name="Text 5"/>
-          <p:cNvSpPr/>
-          <p:nvPr/>
-        </p:nvSpPr>
-        <p:spPr>
-          <a:xfrm>
             <a:off x="406301" y="4434929"/>
             <a:ext cx="8498026" cy="213271"/>
           </a:xfrm>
@@ -2251,7 +2198,7 @@
                 <a:ea typeface="Georgia" pitchFamily="34" charset="-122"/>
                 <a:cs typeface="Georgia" pitchFamily="34" charset="-120"/>
               </a:rPr>
-              <a:t>Teacher's quick notes</a:t>
+              <a:t>Differentiation</a:t>
             </a:r>
             <a:endParaRPr lang="en-US" sz="1800" dirty="0"/>
           </a:p>
@@ -2265,8 +2212,8 @@
         </p:nvSpPr>
         <p:spPr>
           <a:xfrm>
-            <a:off x="406301" y="870942"/>
-            <a:ext cx="8498026" cy="853083"/>
+            <a:off x="634901" y="883593"/>
+            <a:ext cx="8102798" cy="525661"/>
           </a:xfrm>
           <a:prstGeom prst="rect">
             <a:avLst/>
@@ -2278,20 +2225,18 @@
           <a:bodyPr wrap="square" lIns="0" tIns="0" rIns="0" bIns="0" rtlCol="0" anchor="t"/>
           <a:lstStyle/>
           <a:p>
-            <a:pPr algn="l" indent="0" marL="0">
-              <a:lnSpc>
-                <a:spcPts val="1680"/>
-              </a:lnSpc>
-              <a:spcBef>
-                <a:spcPts val="300"/>
-              </a:spcBef>
-              <a:spcAft>
-                <a:spcPts val="300"/>
-              </a:spcAft>
-              <a:buNone/>
-            </a:pPr>
-            <a:r>
-              <a:rPr lang="en-US" sz="1200" dirty="0">
+            <a:pPr algn="l" marL="342900" indent="-342900">
+              <a:lnSpc>
+                <a:spcPts val="1620"/>
+              </a:lnSpc>
+              <a:spcAft>
+                <a:spcPts val="300"/>
+              </a:spcAft>
+              <a:buSzPct val="100000"/>
+              <a:buChar char="•"/>
+            </a:pPr>
+            <a:r>
+              <a:rPr lang="en-US" sz="1200" b="1" dirty="0">
                 <a:solidFill>
                   <a:srgbClr val="2C2C2C"/>
                 </a:solidFill>
@@ -2299,7 +2244,111 @@
                 <a:ea typeface="Verdana" pitchFamily="34" charset="-122"/>
                 <a:cs typeface="Verdana" pitchFamily="34" charset="-120"/>
               </a:rPr>
-              <a:t>– The pronunciation is harder than it looks. Model slowly. Don't correct individual children publicly — they'll get it by Day 6 through repetition. – Some children will ask "what does it mean?" Answer: "all" or "the whole" or "every part." The full meaning becomes clear in Middle band. – This is the first Sanskrit word many children will say with confidence. Honour it. Some will go home and say it 200 times.</a:t>
+              <a:t>Tier up:</a:t>
+            </a:r>
+            <a:pPr algn="l" indent="0" marL="0">
+              <a:lnSpc>
+                <a:spcPts val="1620"/>
+              </a:lnSpc>
+              <a:spcAft>
+                <a:spcPts val="300"/>
+              </a:spcAft>
+              <a:buNone/>
+            </a:pPr>
+            <a:r>
+              <a:rPr lang="en-US" sz="1200" dirty="0">
+                <a:solidFill>
+                  <a:srgbClr val="2C2C2C"/>
+                </a:solidFill>
+                <a:latin typeface="Verdana" pitchFamily="34" charset="0"/>
+                <a:ea typeface="Verdana" pitchFamily="34" charset="-122"/>
+                <a:cs typeface="Verdana" pitchFamily="34" charset="-120"/>
+              </a:rPr>
+              <a:t> Try to write </a:t>
+            </a:r>
+            <a:pPr algn="l" indent="0" marL="0">
+              <a:lnSpc>
+                <a:spcPts val="1620"/>
+              </a:lnSpc>
+              <a:spcAft>
+                <a:spcPts val="300"/>
+              </a:spcAft>
+              <a:buNone/>
+            </a:pPr>
+            <a:r>
+              <a:rPr lang="en-US" sz="1200" i="1" dirty="0">
+                <a:solidFill>
+                  <a:srgbClr val="2C2C2C"/>
+                </a:solidFill>
+                <a:latin typeface="Verdana" pitchFamily="34" charset="0"/>
+                <a:ea typeface="Verdana" pitchFamily="34" charset="-122"/>
+                <a:cs typeface="Verdana" pitchFamily="34" charset="-120"/>
+              </a:rPr>
+              <a:t>Nikhilam</a:t>
+            </a:r>
+            <a:pPr algn="l" indent="0" marL="0">
+              <a:lnSpc>
+                <a:spcPts val="1620"/>
+              </a:lnSpc>
+              <a:spcAft>
+                <a:spcPts val="300"/>
+              </a:spcAft>
+              <a:buNone/>
+            </a:pPr>
+            <a:r>
+              <a:rPr lang="en-US" sz="1200" dirty="0">
+                <a:solidFill>
+                  <a:srgbClr val="2C2C2C"/>
+                </a:solidFill>
+                <a:latin typeface="Verdana" pitchFamily="34" charset="0"/>
+                <a:ea typeface="Verdana" pitchFamily="34" charset="-122"/>
+                <a:cs typeface="Verdana" pitchFamily="34" charset="-120"/>
+              </a:rPr>
+              <a:t> in Devanāgarī (निखिलं). Provide a print-out card.</a:t>
+            </a:r>
+            <a:endParaRPr lang="en-US" sz="1200" dirty="0"/>
+          </a:p>
+          <a:p>
+            <a:pPr algn="l" marL="342900" indent="-342900">
+              <a:lnSpc>
+                <a:spcPts val="1620"/>
+              </a:lnSpc>
+              <a:spcAft>
+                <a:spcPts val="300"/>
+              </a:spcAft>
+              <a:buSzPct val="100000"/>
+              <a:buChar char="•"/>
+            </a:pPr>
+            <a:r>
+              <a:rPr lang="en-US" sz="1200" b="1" dirty="0">
+                <a:solidFill>
+                  <a:srgbClr val="2C2C2C"/>
+                </a:solidFill>
+                <a:latin typeface="Verdana" pitchFamily="34" charset="0"/>
+                <a:ea typeface="Verdana" pitchFamily="34" charset="-122"/>
+                <a:cs typeface="Verdana" pitchFamily="34" charset="-120"/>
+              </a:rPr>
+              <a:t>Tier down:</a:t>
+            </a:r>
+            <a:pPr algn="l" indent="0" marL="0">
+              <a:lnSpc>
+                <a:spcPts val="1620"/>
+              </a:lnSpc>
+              <a:spcAft>
+                <a:spcPts val="300"/>
+              </a:spcAft>
+              <a:buNone/>
+            </a:pPr>
+            <a:r>
+              <a:rPr lang="en-US" sz="1200" dirty="0">
+                <a:solidFill>
+                  <a:srgbClr val="2C2C2C"/>
+                </a:solidFill>
+                <a:latin typeface="Verdana" pitchFamily="34" charset="0"/>
+                <a:ea typeface="Verdana" pitchFamily="34" charset="-122"/>
+                <a:cs typeface="Verdana" pitchFamily="34" charset="-120"/>
+              </a:rPr>
+              <a:t> Just say the word. Drawing is optional.</a:t>
             </a:r>
             <a:endParaRPr lang="en-US" sz="1200" dirty="0"/>
           </a:p>
@@ -2457,7 +2506,7 @@
                 <a:ea typeface="Georgia" pitchFamily="34" charset="-122"/>
                 <a:cs typeface="Georgia" pitchFamily="34" charset="-120"/>
               </a:rPr>
-              <a:t>Citation(s) used (teacher reference, not student-facing)</a:t>
+              <a:t>Teacher's quick notes</a:t>
             </a:r>
             <a:endParaRPr lang="en-US" sz="1800" dirty="0"/>
           </a:p>
@@ -2471,8 +2520,8 @@
         </p:nvSpPr>
         <p:spPr>
           <a:xfrm>
-            <a:off x="406301" y="870942"/>
-            <a:ext cx="8498026" cy="213271"/>
+            <a:off x="634901" y="883593"/>
+            <a:ext cx="8102798" cy="1386483"/>
           </a:xfrm>
           <a:prstGeom prst="rect">
             <a:avLst/>
@@ -2484,17 +2533,15 @@
           <a:bodyPr wrap="square" lIns="0" tIns="0" rIns="0" bIns="0" rtlCol="0" anchor="t"/>
           <a:lstStyle/>
           <a:p>
-            <a:pPr algn="l" indent="0" marL="0">
-              <a:lnSpc>
-                <a:spcPts val="1680"/>
-              </a:lnSpc>
-              <a:spcBef>
-                <a:spcPts val="300"/>
-              </a:spcBef>
-              <a:spcAft>
-                <a:spcPts val="300"/>
-              </a:spcAft>
-              <a:buNone/>
+            <a:pPr algn="l" marL="342900" indent="-342900">
+              <a:lnSpc>
+                <a:spcPts val="1620"/>
+              </a:lnSpc>
+              <a:spcAft>
+                <a:spcPts val="300"/>
+              </a:spcAft>
+              <a:buSzPct val="100000"/>
+              <a:buChar char="•"/>
             </a:pPr>
             <a:r>
               <a:rPr lang="en-US" sz="1200" dirty="0">
@@ -2505,22 +2552,23 @@
                 <a:ea typeface="Verdana" pitchFamily="34" charset="-122"/>
                 <a:cs typeface="Verdana" pitchFamily="34" charset="-120"/>
               </a:rPr>
-              <a:t>– Tirthaji, </a:t>
-            </a:r>
-            <a:pPr algn="l" indent="0" marL="0">
-              <a:lnSpc>
-                <a:spcPts val="1680"/>
-              </a:lnSpc>
-              <a:spcBef>
-                <a:spcPts val="300"/>
-              </a:spcBef>
-              <a:spcAft>
-                <a:spcPts val="300"/>
-              </a:spcAft>
-              <a:buNone/>
-            </a:pPr>
-            <a:r>
-              <a:rPr lang="en-US" sz="1200" i="1" dirty="0">
+              <a:t>The pronunciation is harder than it looks. Model slowly. Don't correct individual children publicly — they'll get it by Day 6 through repetition.</a:t>
+            </a:r>
+            <a:endParaRPr lang="en-US" sz="1200" dirty="0"/>
+          </a:p>
+          <a:p>
+            <a:pPr algn="l" marL="342900" indent="-342900">
+              <a:lnSpc>
+                <a:spcPts val="1620"/>
+              </a:lnSpc>
+              <a:spcAft>
+                <a:spcPts val="300"/>
+              </a:spcAft>
+              <a:buSzPct val="100000"/>
+              <a:buChar char="•"/>
+            </a:pPr>
+            <a:r>
+              <a:rPr lang="en-US" sz="1200" dirty="0">
                 <a:solidFill>
                   <a:srgbClr val="2C2C2C"/>
                 </a:solidFill>
@@ -2528,15 +2576,260 @@
                 <a:ea typeface="Verdana" pitchFamily="34" charset="-122"/>
                 <a:cs typeface="Verdana" pitchFamily="34" charset="-120"/>
               </a:rPr>
+              <a:t>Some children will ask "what does it mean?" Answer: "all" or "the whole" or "every part." The full meaning becomes clear in Middle band.</a:t>
+            </a:r>
+            <a:endParaRPr lang="en-US" sz="1200" dirty="0"/>
+          </a:p>
+          <a:p>
+            <a:pPr algn="l" marL="342900" indent="-342900">
+              <a:lnSpc>
+                <a:spcPts val="1620"/>
+              </a:lnSpc>
+              <a:spcAft>
+                <a:spcPts val="300"/>
+              </a:spcAft>
+              <a:buSzPct val="100000"/>
+              <a:buChar char="•"/>
+            </a:pPr>
+            <a:r>
+              <a:rPr lang="en-US" sz="1200" dirty="0">
+                <a:solidFill>
+                  <a:srgbClr val="2C2C2C"/>
+                </a:solidFill>
+                <a:latin typeface="Verdana" pitchFamily="34" charset="0"/>
+                <a:ea typeface="Verdana" pitchFamily="34" charset="-122"/>
+                <a:cs typeface="Verdana" pitchFamily="34" charset="-120"/>
+              </a:rPr>
+              <a:t>This is the first Sanskrit word many children will say with confidence. Honour it. Some will go home and say it 200 times.</a:t>
+            </a:r>
+            <a:endParaRPr lang="en-US" sz="1200" dirty="0"/>
+          </a:p>
+        </p:txBody>
+      </p:sp>
+      <p:sp>
+        <p:nvSpPr>
+          <p:cNvPr id="5" name="Text 3"/>
+          <p:cNvSpPr/>
+          <p:nvPr/>
+        </p:nvSpPr>
+        <p:spPr>
+          <a:xfrm>
+            <a:off x="406301" y="4434929"/>
+            <a:ext cx="8498026" cy="213271"/>
+          </a:xfrm>
+          <a:prstGeom prst="rect">
+            <a:avLst/>
+          </a:prstGeom>
+          <a:noFill/>
+          <a:ln/>
+        </p:spPr>
+        <p:txBody>
+          <a:bodyPr wrap="square" lIns="0" tIns="0" rIns="0" bIns="0" rtlCol="0" anchor="t"/>
+          <a:lstStyle/>
+          <a:p>
+            <a:pPr algn="l" indent="0" marL="0">
+              <a:lnSpc>
+                <a:spcPts val="1680"/>
+              </a:lnSpc>
+              <a:spcBef>
+                <a:spcPts val="300"/>
+              </a:spcBef>
+              <a:spcAft>
+                <a:spcPts val="300"/>
+              </a:spcAft>
+              <a:buNone/>
+            </a:pPr>
+            <a:r>
+              <a:rPr lang="en-US" sz="1200" dirty="0">
+                <a:solidFill>
+                  <a:srgbClr val="2C2C2C"/>
+                </a:solidFill>
+                <a:latin typeface="Verdana" pitchFamily="34" charset="0"/>
+                <a:ea typeface="Verdana" pitchFamily="34" charset="-122"/>
+                <a:cs typeface="Verdana" pitchFamily="34" charset="-120"/>
+              </a:rPr>
+              <a:t>Primary ·  · IKS Curriculum</a:t>
+            </a:r>
+            <a:endParaRPr lang="en-US" sz="1200" dirty="0"/>
+          </a:p>
+        </p:txBody>
+      </p:sp>
+    </p:spTree>
+  </p:cSld>
+  <p:clrMapOvr>
+    <a:masterClrMapping/>
+  </p:clrMapOvr>
+</p:sld>
+</file>
+
+<file path=ppt/slides/slide12.xml><?xml version="1.0" encoding="utf-8"?>
+<p:sld xmlns:a="http://schemas.openxmlformats.org/drawingml/2006/main" xmlns:r="http://schemas.openxmlformats.org/officeDocument/2006/relationships" xmlns:p="http://schemas.openxmlformats.org/presentationml/2006/main">
+  <p:cSld name="Slide 12">
+    <p:bg>
+      <p:bgPr>
+        <a:solidFill>
+          <a:srgbClr val="FAF7F2"/>
+        </a:solidFill>
+      </p:bgPr>
+    </p:bg>
+    <p:spTree>
+      <p:nvGrpSpPr>
+        <p:cNvPr id="1" name=""/>
+        <p:cNvGrpSpPr/>
+        <p:nvPr/>
+      </p:nvGrpSpPr>
+      <p:grpSpPr>
+        <a:xfrm>
+          <a:off x="0" y="0"/>
+          <a:ext cx="0" cy="0"/>
+          <a:chOff x="0" y="0"/>
+          <a:chExt cx="0" cy="0"/>
+        </a:xfrm>
+      </p:grpSpPr>
+      <p:sp>
+        <p:nvSpPr>
+          <p:cNvPr id="2" name="Text 0"/>
+          <p:cNvSpPr/>
+          <p:nvPr/>
+        </p:nvSpPr>
+        <p:spPr>
+          <a:xfrm>
+            <a:off x="0" y="0"/>
+            <a:ext cx="9144000" cy="101501"/>
+          </a:xfrm>
+          <a:prstGeom prst="rect">
+            <a:avLst/>
+          </a:prstGeom>
+          <a:solidFill>
+            <a:srgbClr val="87A96B"/>
+          </a:solidFill>
+          <a:ln/>
+        </p:spPr>
+        <p:txBody>
+          <a:bodyPr wrap="square" rtlCol="0" anchor="ctr"/>
+          <a:lstStyle/>
+          <a:p>
+            <a:pPr indent="0" marL="0">
+              <a:buNone/>
+            </a:pPr>
+            <a:endParaRPr lang="en-US" dirty="0"/>
+          </a:p>
+        </p:txBody>
+      </p:sp>
+      <p:sp>
+        <p:nvSpPr>
+          <p:cNvPr id="3" name="Text 1"/>
+          <p:cNvSpPr/>
+          <p:nvPr/>
+        </p:nvSpPr>
+        <p:spPr>
+          <a:xfrm>
+            <a:off x="406301" y="457051"/>
+            <a:ext cx="8498026" cy="274290"/>
+          </a:xfrm>
+          <a:prstGeom prst="rect">
+            <a:avLst/>
+          </a:prstGeom>
+          <a:noFill/>
+          <a:ln/>
+        </p:spPr>
+        <p:txBody>
+          <a:bodyPr wrap="square" lIns="0" tIns="0" rIns="0" bIns="0" rtlCol="0" anchor="t"/>
+          <a:lstStyle/>
+          <a:p>
+            <a:pPr algn="l" indent="0" marL="0">
+              <a:lnSpc>
+                <a:spcPts val="2160"/>
+              </a:lnSpc>
+              <a:spcBef>
+                <a:spcPts val="600"/>
+              </a:spcBef>
+              <a:spcAft>
+                <a:spcPts val="800"/>
+              </a:spcAft>
+              <a:buNone/>
+            </a:pPr>
+            <a:r>
+              <a:rPr lang="en-US" sz="1800" b="1" dirty="0">
+                <a:solidFill>
+                  <a:srgbClr val="E07A5F"/>
+                </a:solidFill>
+                <a:latin typeface="Georgia" pitchFamily="34" charset="0"/>
+                <a:ea typeface="Georgia" pitchFamily="34" charset="-122"/>
+                <a:cs typeface="Georgia" pitchFamily="34" charset="-120"/>
+              </a:rPr>
+              <a:t>Citation(s) used (teacher reference, not student-facing)</a:t>
+            </a:r>
+            <a:endParaRPr lang="en-US" sz="1800" dirty="0"/>
+          </a:p>
+        </p:txBody>
+      </p:sp>
+      <p:sp>
+        <p:nvSpPr>
+          <p:cNvPr id="4" name="Text 2"/>
+          <p:cNvSpPr/>
+          <p:nvPr/>
+        </p:nvSpPr>
+        <p:spPr>
+          <a:xfrm>
+            <a:off x="634901" y="883593"/>
+            <a:ext cx="8102798" cy="281880"/>
+          </a:xfrm>
+          <a:prstGeom prst="rect">
+            <a:avLst/>
+          </a:prstGeom>
+          <a:noFill/>
+          <a:ln/>
+        </p:spPr>
+        <p:txBody>
+          <a:bodyPr wrap="square" lIns="0" tIns="0" rIns="0" bIns="0" rtlCol="0" anchor="t"/>
+          <a:lstStyle/>
+          <a:p>
+            <a:pPr algn="l" marL="342900" indent="-342900">
+              <a:lnSpc>
+                <a:spcPts val="1620"/>
+              </a:lnSpc>
+              <a:spcAft>
+                <a:spcPts val="300"/>
+              </a:spcAft>
+              <a:buSzPct val="100000"/>
+              <a:buChar char="•"/>
+            </a:pPr>
+            <a:r>
+              <a:rPr lang="en-US" sz="1200" dirty="0">
+                <a:solidFill>
+                  <a:srgbClr val="2C2C2C"/>
+                </a:solidFill>
+                <a:latin typeface="Verdana" pitchFamily="34" charset="0"/>
+                <a:ea typeface="Verdana" pitchFamily="34" charset="-122"/>
+                <a:cs typeface="Verdana" pitchFamily="34" charset="-120"/>
+              </a:rPr>
+              <a:t>Tirthaji, </a:t>
+            </a:r>
+            <a:pPr algn="l" indent="0" marL="0">
+              <a:lnSpc>
+                <a:spcPts val="1620"/>
+              </a:lnSpc>
+              <a:spcAft>
+                <a:spcPts val="300"/>
+              </a:spcAft>
+              <a:buNone/>
+            </a:pPr>
+            <a:r>
+              <a:rPr lang="en-US" sz="1200" i="1" dirty="0">
+                <a:solidFill>
+                  <a:srgbClr val="2C2C2C"/>
+                </a:solidFill>
+                <a:latin typeface="Verdana" pitchFamily="34" charset="0"/>
+                <a:ea typeface="Verdana" pitchFamily="34" charset="-122"/>
+                <a:cs typeface="Verdana" pitchFamily="34" charset="-120"/>
+              </a:rPr>
               <a:t>Vedic Mathematics</a:t>
             </a:r>
             <a:pPr algn="l" indent="0" marL="0">
               <a:lnSpc>
-                <a:spcPts val="1680"/>
-              </a:lnSpc>
-              <a:spcBef>
-                <a:spcPts val="300"/>
-              </a:spcBef>
+                <a:spcPts val="1620"/>
+              </a:lnSpc>
               <a:spcAft>
                 <a:spcPts val="300"/>
               </a:spcAft>
@@ -2709,7 +3002,7 @@
                 <a:ea typeface="Georgia" pitchFamily="34" charset="-122"/>
                 <a:cs typeface="Georgia" pitchFamily="34" charset="-120"/>
               </a:rPr>
-              <a:t>Materials</a:t>
+              <a:t>Goal</a:t>
             </a:r>
             <a:endParaRPr lang="en-US" sz="1800" dirty="0"/>
           </a:p>
@@ -2757,7 +3050,7 @@
                 <a:ea typeface="Verdana" pitchFamily="34" charset="-122"/>
                 <a:cs typeface="Verdana" pitchFamily="34" charset="-120"/>
               </a:rPr>
-              <a:t>– A new wall poster: the word </a:t>
+              <a:t>Children meet the Sanskrit word </a:t>
             </a:r>
             <a:pPr algn="l" indent="0" marL="0">
               <a:lnSpc>
@@ -2772,7 +3065,7 @@
               <a:buNone/>
             </a:pPr>
             <a:r>
-              <a:rPr lang="en-US" sz="1200" b="1" i="1" dirty="0">
+              <a:rPr lang="en-US" sz="1200" i="1" dirty="0">
                 <a:solidFill>
                   <a:srgbClr val="2C2C2C"/>
                 </a:solidFill>
@@ -2803,7 +3096,7 @@
                 <a:ea typeface="Verdana" pitchFamily="34" charset="-122"/>
                 <a:cs typeface="Verdana" pitchFamily="34" charset="-120"/>
               </a:rPr>
-              <a:t> in big letters, with a smiling face. Underneath, in small letters: "the friend rule." – Drawing paper – Crayons</a:t>
+              <a:t>. They learn to pronounce it, recognise the wall poster, and connect it to "friends to ten."</a:t>
             </a:r>
             <a:endParaRPr lang="en-US" sz="1200" dirty="0"/>
           </a:p>
@@ -2961,7 +3254,7 @@
                 <a:ea typeface="Georgia" pitchFamily="34" charset="-122"/>
                 <a:cs typeface="Georgia" pitchFamily="34" charset="-120"/>
               </a:rPr>
-              <a:t>The flow</a:t>
+              <a:t>Materials</a:t>
             </a:r>
             <a:endParaRPr lang="en-US" sz="1800" dirty="0"/>
           </a:p>
@@ -2970,6 +3263,140 @@
       <p:sp>
         <p:nvSpPr>
           <p:cNvPr id="4" name="Text 2"/>
+          <p:cNvSpPr/>
+          <p:nvPr/>
+        </p:nvSpPr>
+        <p:spPr>
+          <a:xfrm>
+            <a:off x="634901" y="883593"/>
+            <a:ext cx="8102798" cy="975122"/>
+          </a:xfrm>
+          <a:prstGeom prst="rect">
+            <a:avLst/>
+          </a:prstGeom>
+          <a:noFill/>
+          <a:ln/>
+        </p:spPr>
+        <p:txBody>
+          <a:bodyPr wrap="square" lIns="0" tIns="0" rIns="0" bIns="0" rtlCol="0" anchor="t"/>
+          <a:lstStyle/>
+          <a:p>
+            <a:pPr algn="l" marL="342900" indent="-342900">
+              <a:lnSpc>
+                <a:spcPts val="1620"/>
+              </a:lnSpc>
+              <a:spcAft>
+                <a:spcPts val="300"/>
+              </a:spcAft>
+              <a:buSzPct val="100000"/>
+              <a:buChar char="•"/>
+            </a:pPr>
+            <a:r>
+              <a:rPr lang="en-US" sz="1200" dirty="0">
+                <a:solidFill>
+                  <a:srgbClr val="2C2C2C"/>
+                </a:solidFill>
+                <a:latin typeface="Verdana" pitchFamily="34" charset="0"/>
+                <a:ea typeface="Verdana" pitchFamily="34" charset="-122"/>
+                <a:cs typeface="Verdana" pitchFamily="34" charset="-120"/>
+              </a:rPr>
+              <a:t>A new wall poster: the word </a:t>
+            </a:r>
+            <a:pPr algn="l" indent="0" marL="0">
+              <a:lnSpc>
+                <a:spcPts val="1620"/>
+              </a:lnSpc>
+              <a:spcAft>
+                <a:spcPts val="300"/>
+              </a:spcAft>
+              <a:buNone/>
+            </a:pPr>
+            <a:r>
+              <a:rPr lang="en-US" sz="1200" b="1" i="1" dirty="0">
+                <a:solidFill>
+                  <a:srgbClr val="2C2C2C"/>
+                </a:solidFill>
+                <a:latin typeface="Verdana" pitchFamily="34" charset="0"/>
+                <a:ea typeface="Verdana" pitchFamily="34" charset="-122"/>
+                <a:cs typeface="Verdana" pitchFamily="34" charset="-120"/>
+              </a:rPr>
+              <a:t>Nikhilam</a:t>
+            </a:r>
+            <a:pPr algn="l" indent="0" marL="0">
+              <a:lnSpc>
+                <a:spcPts val="1620"/>
+              </a:lnSpc>
+              <a:spcAft>
+                <a:spcPts val="300"/>
+              </a:spcAft>
+              <a:buNone/>
+            </a:pPr>
+            <a:r>
+              <a:rPr lang="en-US" sz="1200" dirty="0">
+                <a:solidFill>
+                  <a:srgbClr val="2C2C2C"/>
+                </a:solidFill>
+                <a:latin typeface="Verdana" pitchFamily="34" charset="0"/>
+                <a:ea typeface="Verdana" pitchFamily="34" charset="-122"/>
+                <a:cs typeface="Verdana" pitchFamily="34" charset="-120"/>
+              </a:rPr>
+              <a:t> in big letters, with a smiling face. Underneath, in small letters: "the friend rule."</a:t>
+            </a:r>
+            <a:endParaRPr lang="en-US" sz="1200" dirty="0"/>
+          </a:p>
+          <a:p>
+            <a:pPr algn="l" marL="342900" indent="-342900">
+              <a:lnSpc>
+                <a:spcPts val="1620"/>
+              </a:lnSpc>
+              <a:spcAft>
+                <a:spcPts val="300"/>
+              </a:spcAft>
+              <a:buSzPct val="100000"/>
+              <a:buChar char="•"/>
+            </a:pPr>
+            <a:r>
+              <a:rPr lang="en-US" sz="1200" dirty="0">
+                <a:solidFill>
+                  <a:srgbClr val="2C2C2C"/>
+                </a:solidFill>
+                <a:latin typeface="Verdana" pitchFamily="34" charset="0"/>
+                <a:ea typeface="Verdana" pitchFamily="34" charset="-122"/>
+                <a:cs typeface="Verdana" pitchFamily="34" charset="-120"/>
+              </a:rPr>
+              <a:t>Drawing paper</a:t>
+            </a:r>
+            <a:endParaRPr lang="en-US" sz="1200" dirty="0"/>
+          </a:p>
+          <a:p>
+            <a:pPr algn="l" marL="342900" indent="-342900">
+              <a:lnSpc>
+                <a:spcPts val="1620"/>
+              </a:lnSpc>
+              <a:spcAft>
+                <a:spcPts val="300"/>
+              </a:spcAft>
+              <a:buSzPct val="100000"/>
+              <a:buChar char="•"/>
+            </a:pPr>
+            <a:r>
+              <a:rPr lang="en-US" sz="1200" dirty="0">
+                <a:solidFill>
+                  <a:srgbClr val="2C2C2C"/>
+                </a:solidFill>
+                <a:latin typeface="Verdana" pitchFamily="34" charset="0"/>
+                <a:ea typeface="Verdana" pitchFamily="34" charset="-122"/>
+                <a:cs typeface="Verdana" pitchFamily="34" charset="-120"/>
+              </a:rPr>
+              <a:t>Crayons</a:t>
+            </a:r>
+            <a:endParaRPr lang="en-US" sz="1200" dirty="0"/>
+          </a:p>
+        </p:txBody>
+      </p:sp>
+      <p:sp>
+        <p:nvSpPr>
+          <p:cNvPr id="5" name="Text 3"/>
           <p:cNvSpPr/>
           <p:nvPr/>
         </p:nvSpPr>
@@ -3119,7 +3546,7 @@
                 <a:ea typeface="Georgia" pitchFamily="34" charset="-122"/>
                 <a:cs typeface="Georgia" pitchFamily="34" charset="-120"/>
               </a:rPr>
-              <a:t>Settle + chant (5 min)</a:t>
+              <a:t>The flow</a:t>
             </a:r>
             <a:endParaRPr lang="en-US" sz="1800" dirty="0"/>
           </a:p>
@@ -3128,54 +3555,6 @@
       <p:sp>
         <p:nvSpPr>
           <p:cNvPr id="4" name="Text 2"/>
-          <p:cNvSpPr/>
-          <p:nvPr/>
-        </p:nvSpPr>
-        <p:spPr>
-          <a:xfrm>
-            <a:off x="406301" y="870942"/>
-            <a:ext cx="8498026" cy="213271"/>
-          </a:xfrm>
-          <a:prstGeom prst="rect">
-            <a:avLst/>
-          </a:prstGeom>
-          <a:noFill/>
-          <a:ln/>
-        </p:spPr>
-        <p:txBody>
-          <a:bodyPr wrap="square" lIns="0" tIns="0" rIns="0" bIns="0" rtlCol="0" anchor="t"/>
-          <a:lstStyle/>
-          <a:p>
-            <a:pPr algn="l" indent="0" marL="0">
-              <a:lnSpc>
-                <a:spcPts val="1680"/>
-              </a:lnSpc>
-              <a:spcBef>
-                <a:spcPts val="300"/>
-              </a:spcBef>
-              <a:spcAft>
-                <a:spcPts val="300"/>
-              </a:spcAft>
-              <a:buNone/>
-            </a:pPr>
-            <a:r>
-              <a:rPr lang="en-US" sz="1200" dirty="0">
-                <a:solidFill>
-                  <a:srgbClr val="2C2C2C"/>
-                </a:solidFill>
-                <a:latin typeface="Verdana" pitchFamily="34" charset="0"/>
-                <a:ea typeface="Verdana" pitchFamily="34" charset="-122"/>
-                <a:cs typeface="Verdana" pitchFamily="34" charset="-120"/>
-              </a:rPr>
-              <a:t>The friends-to-ten chant, 3 times.</a:t>
-            </a:r>
-            <a:endParaRPr lang="en-US" sz="1200" dirty="0"/>
-          </a:p>
-        </p:txBody>
-      </p:sp>
-      <p:sp>
-        <p:nvSpPr>
-          <p:cNvPr id="5" name="Text 3"/>
           <p:cNvSpPr/>
           <p:nvPr/>
         </p:nvSpPr>
@@ -3325,7 +3704,7 @@
                 <a:ea typeface="Georgia" pitchFamily="34" charset="-122"/>
                 <a:cs typeface="Georgia" pitchFamily="34" charset="-120"/>
               </a:rPr>
-              <a:t>The magic-word story (10 min)</a:t>
+              <a:t>Settle + chant (5 min)</a:t>
             </a:r>
             <a:endParaRPr lang="en-US" sz="1800" dirty="0"/>
           </a:p>
@@ -3339,61 +3718,8 @@
         </p:nvSpPr>
         <p:spPr>
           <a:xfrm>
-            <a:off x="406301" y="883593"/>
-            <a:ext cx="8331398" cy="2726531"/>
-          </a:xfrm>
-          <a:prstGeom prst="rect">
-            <a:avLst/>
-          </a:prstGeom>
-          <a:solidFill>
-            <a:srgbClr val="FFFFFF"/>
-          </a:solidFill>
-          <a:ln/>
-        </p:spPr>
-        <p:txBody>
-          <a:bodyPr wrap="square" rtlCol="0" anchor="ctr"/>
-          <a:lstStyle/>
-          <a:p>
-            <a:pPr indent="0" marL="0">
-              <a:buNone/>
-            </a:pPr>
-            <a:endParaRPr lang="en-US" dirty="0"/>
-          </a:p>
-        </p:txBody>
-      </p:sp>
-      <p:sp>
-        <p:nvSpPr>
-          <p:cNvPr id="5" name="Shape 3"/>
-          <p:cNvSpPr/>
-          <p:nvPr/>
-        </p:nvSpPr>
-        <p:spPr>
-          <a:xfrm>
-            <a:off x="434876" y="883593"/>
-            <a:ext cx="0" cy="2726531"/>
-          </a:xfrm>
-          <a:prstGeom prst="line">
-            <a:avLst/>
-          </a:prstGeom>
-          <a:noFill/>
-          <a:ln w="57150">
-            <a:solidFill>
-              <a:srgbClr val="E07A5F"/>
-            </a:solidFill>
-            <a:prstDash val="solid"/>
-          </a:ln>
-        </p:spPr>
-      </p:sp>
-      <p:sp>
-        <p:nvSpPr>
-          <p:cNvPr id="6" name="Text 4"/>
-          <p:cNvSpPr/>
-          <p:nvPr/>
-        </p:nvSpPr>
-        <p:spPr>
-          <a:xfrm>
-            <a:off x="692051" y="1074093"/>
-            <a:ext cx="7973389" cy="230981"/>
+            <a:off x="406301" y="870942"/>
+            <a:ext cx="8498026" cy="213271"/>
           </a:xfrm>
           <a:prstGeom prst="rect">
             <a:avLst/>
@@ -3407,7 +3733,7 @@
           <a:p>
             <a:pPr algn="l" indent="0" marL="0">
               <a:lnSpc>
-                <a:spcPts val="1820"/>
+                <a:spcPts val="1680"/>
               </a:lnSpc>
               <a:spcBef>
                 <a:spcPts val="300"/>
@@ -3418,497 +3744,23 @@
               <a:buNone/>
             </a:pPr>
             <a:r>
-              <a:rPr lang="en-US" sz="1300" b="1" i="1" dirty="0">
-                <a:solidFill>
-                  <a:srgbClr val="2C2C2C"/>
-                </a:solidFill>
-                <a:latin typeface="Georgia" pitchFamily="34" charset="0"/>
-                <a:ea typeface="Georgia" pitchFamily="34" charset="-122"/>
-                <a:cs typeface="Georgia" pitchFamily="34" charset="-120"/>
-              </a:rPr>
-              <a:t>The Sanskrit Word</a:t>
-            </a:r>
-            <a:endParaRPr lang="en-US" sz="1300" dirty="0"/>
-          </a:p>
-        </p:txBody>
-      </p:sp>
-      <p:sp>
-        <p:nvSpPr>
-          <p:cNvPr id="7" name="Text 5"/>
-          <p:cNvSpPr/>
-          <p:nvPr/>
-        </p:nvSpPr>
-        <p:spPr>
-          <a:xfrm>
-            <a:off x="692051" y="1343174"/>
-            <a:ext cx="7973389" cy="230981"/>
-          </a:xfrm>
-          <a:prstGeom prst="rect">
-            <a:avLst/>
-          </a:prstGeom>
-          <a:noFill/>
-          <a:ln/>
-        </p:spPr>
-        <p:txBody>
-          <a:bodyPr wrap="square" lIns="0" tIns="0" rIns="0" bIns="0" rtlCol="0" anchor="t"/>
-          <a:lstStyle/>
-          <a:p>
-            <a:pPr algn="l" indent="0" marL="0">
-              <a:lnSpc>
-                <a:spcPts val="1820"/>
-              </a:lnSpc>
-              <a:spcBef>
-                <a:spcPts val="300"/>
-              </a:spcBef>
-              <a:spcAft>
-                <a:spcPts val="300"/>
-              </a:spcAft>
-              <a:buNone/>
-            </a:pPr>
-            <a:r>
-              <a:rPr lang="en-US" sz="1300" i="1" dirty="0">
-                <a:solidFill>
-                  <a:srgbClr val="2C2C2C"/>
-                </a:solidFill>
-                <a:latin typeface="Georgia" pitchFamily="34" charset="0"/>
-                <a:ea typeface="Georgia" pitchFamily="34" charset="-122"/>
-                <a:cs typeface="Georgia" pitchFamily="34" charset="-120"/>
-              </a:rPr>
-              <a:t>Long ago, people in India had a special name for "the friend rule." The name is a Sanskrit word.</a:t>
-            </a:r>
-            <a:endParaRPr lang="en-US" sz="1300" dirty="0"/>
-          </a:p>
-        </p:txBody>
-      </p:sp>
-      <p:sp>
-        <p:nvSpPr>
-          <p:cNvPr id="8" name="Text 6"/>
-          <p:cNvSpPr/>
-          <p:nvPr/>
-        </p:nvSpPr>
-        <p:spPr>
-          <a:xfrm>
-            <a:off x="692051" y="1612255"/>
-            <a:ext cx="7973389" cy="230981"/>
-          </a:xfrm>
-          <a:prstGeom prst="rect">
-            <a:avLst/>
-          </a:prstGeom>
-          <a:noFill/>
-          <a:ln/>
-        </p:spPr>
-        <p:txBody>
-          <a:bodyPr wrap="square" lIns="0" tIns="0" rIns="0" bIns="0" rtlCol="0" anchor="t"/>
-          <a:lstStyle/>
-          <a:p>
-            <a:pPr algn="l" indent="0" marL="0">
-              <a:lnSpc>
-                <a:spcPts val="1820"/>
-              </a:lnSpc>
-              <a:spcBef>
-                <a:spcPts val="300"/>
-              </a:spcBef>
-              <a:spcAft>
-                <a:spcPts val="300"/>
-              </a:spcAft>
-              <a:buNone/>
-            </a:pPr>
-            <a:r>
-              <a:rPr lang="en-US" sz="1300" i="1" dirty="0">
-                <a:solidFill>
-                  <a:srgbClr val="2C2C2C"/>
-                </a:solidFill>
-                <a:latin typeface="Georgia" pitchFamily="34" charset="0"/>
-                <a:ea typeface="Georgia" pitchFamily="34" charset="-122"/>
-                <a:cs typeface="Georgia" pitchFamily="34" charset="-120"/>
-              </a:rPr>
-              <a:t>(Pause for suspense.)</a:t>
-            </a:r>
-            <a:endParaRPr lang="en-US" sz="1300" dirty="0"/>
-          </a:p>
-        </p:txBody>
-      </p:sp>
-      <p:sp>
-        <p:nvSpPr>
-          <p:cNvPr id="9" name="Text 7"/>
-          <p:cNvSpPr/>
-          <p:nvPr/>
-        </p:nvSpPr>
-        <p:spPr>
-          <a:xfrm>
-            <a:off x="692051" y="1881336"/>
-            <a:ext cx="7973389" cy="230981"/>
-          </a:xfrm>
-          <a:prstGeom prst="rect">
-            <a:avLst/>
-          </a:prstGeom>
-          <a:noFill/>
-          <a:ln/>
-        </p:spPr>
-        <p:txBody>
-          <a:bodyPr wrap="square" lIns="0" tIns="0" rIns="0" bIns="0" rtlCol="0" anchor="t"/>
-          <a:lstStyle/>
-          <a:p>
-            <a:pPr algn="l" indent="0" marL="0">
-              <a:lnSpc>
-                <a:spcPts val="1820"/>
-              </a:lnSpc>
-              <a:spcBef>
-                <a:spcPts val="300"/>
-              </a:spcBef>
-              <a:spcAft>
-                <a:spcPts val="300"/>
-              </a:spcAft>
-              <a:buNone/>
-            </a:pPr>
-            <a:r>
-              <a:rPr lang="en-US" sz="1300" i="1" dirty="0">
-                <a:solidFill>
-                  <a:srgbClr val="2C2C2C"/>
-                </a:solidFill>
-                <a:latin typeface="Georgia" pitchFamily="34" charset="0"/>
-                <a:ea typeface="Georgia" pitchFamily="34" charset="-122"/>
-                <a:cs typeface="Georgia" pitchFamily="34" charset="-120"/>
-              </a:rPr>
-              <a:t>Are you ready?</a:t>
-            </a:r>
-            <a:endParaRPr lang="en-US" sz="1300" dirty="0"/>
-          </a:p>
-        </p:txBody>
-      </p:sp>
-      <p:sp>
-        <p:nvSpPr>
-          <p:cNvPr id="10" name="Text 8"/>
-          <p:cNvSpPr/>
-          <p:nvPr/>
-        </p:nvSpPr>
-        <p:spPr>
-          <a:xfrm>
-            <a:off x="692051" y="2150418"/>
-            <a:ext cx="7973389" cy="230981"/>
-          </a:xfrm>
-          <a:prstGeom prst="rect">
-            <a:avLst/>
-          </a:prstGeom>
-          <a:noFill/>
-          <a:ln/>
-        </p:spPr>
-        <p:txBody>
-          <a:bodyPr wrap="square" lIns="0" tIns="0" rIns="0" bIns="0" rtlCol="0" anchor="t"/>
-          <a:lstStyle/>
-          <a:p>
-            <a:pPr algn="l" indent="0" marL="0">
-              <a:lnSpc>
-                <a:spcPts val="1820"/>
-              </a:lnSpc>
-              <a:spcBef>
-                <a:spcPts val="300"/>
-              </a:spcBef>
-              <a:spcAft>
-                <a:spcPts val="300"/>
-              </a:spcAft>
-              <a:buNone/>
-            </a:pPr>
-            <a:r>
-              <a:rPr lang="en-US" sz="1300" dirty="0">
-                <a:solidFill>
-                  <a:srgbClr val="2C2C2C"/>
-                </a:solidFill>
-                <a:latin typeface="Georgia" pitchFamily="34" charset="0"/>
-                <a:ea typeface="Georgia" pitchFamily="34" charset="-122"/>
-                <a:cs typeface="Georgia" pitchFamily="34" charset="-120"/>
-              </a:rPr>
-              <a:t>The word is — </a:t>
-            </a:r>
-            <a:pPr algn="l" indent="0" marL="0">
-              <a:lnSpc>
-                <a:spcPts val="1820"/>
-              </a:lnSpc>
-              <a:spcBef>
-                <a:spcPts val="300"/>
-              </a:spcBef>
-              <a:spcAft>
-                <a:spcPts val="300"/>
-              </a:spcAft>
-              <a:buNone/>
-            </a:pPr>
-            <a:r>
-              <a:rPr lang="en-US" sz="1300" b="1" i="1" dirty="0">
-                <a:solidFill>
-                  <a:srgbClr val="2C2C2C"/>
-                </a:solidFill>
-                <a:latin typeface="Georgia" pitchFamily="34" charset="0"/>
-                <a:ea typeface="Georgia" pitchFamily="34" charset="-122"/>
-                <a:cs typeface="Georgia" pitchFamily="34" charset="-120"/>
-              </a:rPr>
-              <a:t>Nikhilam</a:t>
-            </a:r>
-            <a:pPr algn="l" indent="0" marL="0">
-              <a:lnSpc>
-                <a:spcPts val="1820"/>
-              </a:lnSpc>
-              <a:spcBef>
-                <a:spcPts val="300"/>
-              </a:spcBef>
-              <a:spcAft>
-                <a:spcPts val="300"/>
-              </a:spcAft>
-              <a:buNone/>
-            </a:pPr>
-            <a:r>
-              <a:rPr lang="en-US" sz="1300" dirty="0">
-                <a:solidFill>
-                  <a:srgbClr val="2C2C2C"/>
-                </a:solidFill>
-                <a:latin typeface="Georgia" pitchFamily="34" charset="0"/>
-                <a:ea typeface="Georgia" pitchFamily="34" charset="-122"/>
-                <a:cs typeface="Georgia" pitchFamily="34" charset="-120"/>
-              </a:rPr>
-              <a:t>! </a:t>
-            </a:r>
-            <a:pPr algn="l" indent="0" marL="0">
-              <a:lnSpc>
-                <a:spcPts val="1820"/>
-              </a:lnSpc>
-              <a:spcBef>
-                <a:spcPts val="300"/>
-              </a:spcBef>
-              <a:spcAft>
-                <a:spcPts val="300"/>
-              </a:spcAft>
-              <a:buNone/>
-            </a:pPr>
-            <a:r>
-              <a:rPr lang="en-US" sz="1300" i="1" dirty="0">
-                <a:solidFill>
-                  <a:srgbClr val="2C2C2C"/>
-                </a:solidFill>
-                <a:latin typeface="Georgia" pitchFamily="34" charset="0"/>
-                <a:ea typeface="Georgia" pitchFamily="34" charset="-122"/>
-                <a:cs typeface="Georgia" pitchFamily="34" charset="-120"/>
-              </a:rPr>
-              <a:t>(Say it slowly: ni-khi-lam.)</a:t>
-            </a:r>
-            <a:endParaRPr lang="en-US" sz="1300" dirty="0"/>
-          </a:p>
-        </p:txBody>
-      </p:sp>
-      <p:sp>
-        <p:nvSpPr>
-          <p:cNvPr id="11" name="Text 9"/>
-          <p:cNvSpPr/>
-          <p:nvPr/>
-        </p:nvSpPr>
-        <p:spPr>
-          <a:xfrm>
-            <a:off x="692051" y="2419499"/>
-            <a:ext cx="7973389" cy="230981"/>
-          </a:xfrm>
-          <a:prstGeom prst="rect">
-            <a:avLst/>
-          </a:prstGeom>
-          <a:noFill/>
-          <a:ln/>
-        </p:spPr>
-        <p:txBody>
-          <a:bodyPr wrap="square" lIns="0" tIns="0" rIns="0" bIns="0" rtlCol="0" anchor="t"/>
-          <a:lstStyle/>
-          <a:p>
-            <a:pPr algn="l" indent="0" marL="0">
-              <a:lnSpc>
-                <a:spcPts val="1820"/>
-              </a:lnSpc>
-              <a:spcBef>
-                <a:spcPts val="300"/>
-              </a:spcBef>
-              <a:spcAft>
-                <a:spcPts val="300"/>
-              </a:spcAft>
-              <a:buNone/>
-            </a:pPr>
-            <a:r>
-              <a:rPr lang="en-US" sz="1300" i="1" dirty="0">
-                <a:solidFill>
-                  <a:srgbClr val="2C2C2C"/>
-                </a:solidFill>
-                <a:latin typeface="Georgia" pitchFamily="34" charset="0"/>
-                <a:ea typeface="Georgia" pitchFamily="34" charset="-122"/>
-                <a:cs typeface="Georgia" pitchFamily="34" charset="-120"/>
-              </a:rPr>
-              <a:t>(Class echoes 3 times. Soft / normal / loud. Children find it funny — let them.)</a:t>
-            </a:r>
-            <a:endParaRPr lang="en-US" sz="1300" dirty="0"/>
-          </a:p>
-        </p:txBody>
-      </p:sp>
-      <p:sp>
-        <p:nvSpPr>
-          <p:cNvPr id="12" name="Text 10"/>
-          <p:cNvSpPr/>
-          <p:nvPr/>
-        </p:nvSpPr>
-        <p:spPr>
-          <a:xfrm>
-            <a:off x="692051" y="2688580"/>
-            <a:ext cx="7973389" cy="230981"/>
-          </a:xfrm>
-          <a:prstGeom prst="rect">
-            <a:avLst/>
-          </a:prstGeom>
-          <a:noFill/>
-          <a:ln/>
-        </p:spPr>
-        <p:txBody>
-          <a:bodyPr wrap="square" lIns="0" tIns="0" rIns="0" bIns="0" rtlCol="0" anchor="t"/>
-          <a:lstStyle/>
-          <a:p>
-            <a:pPr algn="l" indent="0" marL="0">
-              <a:lnSpc>
-                <a:spcPts val="1820"/>
-              </a:lnSpc>
-              <a:spcBef>
-                <a:spcPts val="300"/>
-              </a:spcBef>
-              <a:spcAft>
-                <a:spcPts val="300"/>
-              </a:spcAft>
-              <a:buNone/>
-            </a:pPr>
-            <a:r>
-              <a:rPr lang="en-US" sz="1300" i="1" dirty="0">
-                <a:solidFill>
-                  <a:srgbClr val="2C2C2C"/>
-                </a:solidFill>
-                <a:latin typeface="Georgia" pitchFamily="34" charset="0"/>
-                <a:ea typeface="Georgia" pitchFamily="34" charset="-122"/>
-                <a:cs typeface="Georgia" pitchFamily="34" charset="-120"/>
-              </a:rPr>
-              <a:t>Nikhilam</a:t>
-            </a:r>
-            <a:pPr algn="l" indent="0" marL="0">
-              <a:lnSpc>
-                <a:spcPts val="1820"/>
-              </a:lnSpc>
-              <a:spcBef>
-                <a:spcPts val="300"/>
-              </a:spcBef>
-              <a:spcAft>
-                <a:spcPts val="300"/>
-              </a:spcAft>
-              <a:buNone/>
-            </a:pPr>
-            <a:r>
-              <a:rPr lang="en-US" sz="1300" dirty="0">
-                <a:solidFill>
-                  <a:srgbClr val="2C2C2C"/>
-                </a:solidFill>
-                <a:latin typeface="Georgia" pitchFamily="34" charset="0"/>
-                <a:ea typeface="Georgia" pitchFamily="34" charset="-122"/>
-                <a:cs typeface="Georgia" pitchFamily="34" charset="-120"/>
-              </a:rPr>
-              <a:t> means "all of it" or "the whole." It's the secret name for our friends-to-ten rule.</a:t>
-            </a:r>
-            <a:endParaRPr lang="en-US" sz="1300" dirty="0"/>
-          </a:p>
-        </p:txBody>
-      </p:sp>
-      <p:sp>
-        <p:nvSpPr>
-          <p:cNvPr id="13" name="Text 11"/>
-          <p:cNvSpPr/>
-          <p:nvPr/>
-        </p:nvSpPr>
-        <p:spPr>
-          <a:xfrm>
-            <a:off x="692051" y="2957661"/>
-            <a:ext cx="7973389" cy="461963"/>
-          </a:xfrm>
-          <a:prstGeom prst="rect">
-            <a:avLst/>
-          </a:prstGeom>
-          <a:noFill/>
-          <a:ln/>
-        </p:spPr>
-        <p:txBody>
-          <a:bodyPr wrap="square" lIns="0" tIns="0" rIns="0" bIns="0" rtlCol="0" anchor="t"/>
-          <a:lstStyle/>
-          <a:p>
-            <a:pPr algn="l" indent="0" marL="0">
-              <a:lnSpc>
-                <a:spcPts val="1820"/>
-              </a:lnSpc>
-              <a:spcBef>
-                <a:spcPts val="300"/>
-              </a:spcBef>
-              <a:spcAft>
-                <a:spcPts val="300"/>
-              </a:spcAft>
-              <a:buNone/>
-            </a:pPr>
-            <a:r>
-              <a:rPr lang="en-US" sz="1300" dirty="0">
-                <a:solidFill>
-                  <a:srgbClr val="2C2C2C"/>
-                </a:solidFill>
-                <a:latin typeface="Georgia" pitchFamily="34" charset="0"/>
-                <a:ea typeface="Georgia" pitchFamily="34" charset="-122"/>
-                <a:cs typeface="Georgia" pitchFamily="34" charset="-120"/>
-              </a:rPr>
-              <a:t>An older book from 1965 gives this rule a fancy name. We'll learn the long name in Grade 6. For today — just say </a:t>
-            </a:r>
-            <a:pPr algn="l" indent="0" marL="0">
-              <a:lnSpc>
-                <a:spcPts val="1820"/>
-              </a:lnSpc>
-              <a:spcBef>
-                <a:spcPts val="300"/>
-              </a:spcBef>
-              <a:spcAft>
-                <a:spcPts val="300"/>
-              </a:spcAft>
-              <a:buNone/>
-            </a:pPr>
-            <a:r>
-              <a:rPr lang="en-US" sz="1300" i="1" dirty="0">
-                <a:solidFill>
-                  <a:srgbClr val="2C2C2C"/>
-                </a:solidFill>
-                <a:latin typeface="Georgia" pitchFamily="34" charset="0"/>
-                <a:ea typeface="Georgia" pitchFamily="34" charset="-122"/>
-                <a:cs typeface="Georgia" pitchFamily="34" charset="-120"/>
-              </a:rPr>
-              <a:t>Nikhilam</a:t>
-            </a:r>
-            <a:pPr algn="l" indent="0" marL="0">
-              <a:lnSpc>
-                <a:spcPts val="1820"/>
-              </a:lnSpc>
-              <a:spcBef>
-                <a:spcPts val="300"/>
-              </a:spcBef>
-              <a:spcAft>
-                <a:spcPts val="300"/>
-              </a:spcAft>
-              <a:buNone/>
-            </a:pPr>
-            <a:r>
-              <a:rPr lang="en-US" sz="1300" dirty="0">
-                <a:solidFill>
-                  <a:srgbClr val="2C2C2C"/>
-                </a:solidFill>
-                <a:latin typeface="Georgia" pitchFamily="34" charset="0"/>
-                <a:ea typeface="Georgia" pitchFamily="34" charset="-122"/>
-                <a:cs typeface="Georgia" pitchFamily="34" charset="-120"/>
-              </a:rPr>
-              <a:t>. The friend rule. The whole. All of it.</a:t>
-            </a:r>
-            <a:endParaRPr lang="en-US" sz="1300" dirty="0"/>
-          </a:p>
-        </p:txBody>
-      </p:sp>
-      <p:sp>
-        <p:nvSpPr>
-          <p:cNvPr id="14" name="Text 12"/>
+              <a:rPr lang="en-US" sz="1200" dirty="0">
+                <a:solidFill>
+                  <a:srgbClr val="2C2C2C"/>
+                </a:solidFill>
+                <a:latin typeface="Verdana" pitchFamily="34" charset="0"/>
+                <a:ea typeface="Verdana" pitchFamily="34" charset="-122"/>
+                <a:cs typeface="Verdana" pitchFamily="34" charset="-120"/>
+              </a:rPr>
+              <a:t>The friends-to-ten chant, 3 times.</a:t>
+            </a:r>
+            <a:endParaRPr lang="en-US" sz="1200" dirty="0"/>
+          </a:p>
+        </p:txBody>
+      </p:sp>
+      <p:sp>
+        <p:nvSpPr>
+          <p:cNvPr id="5" name="Text 3"/>
           <p:cNvSpPr/>
           <p:nvPr/>
         </p:nvSpPr>
@@ -4058,7 +3910,7 @@
                 <a:ea typeface="Georgia" pitchFamily="34" charset="-122"/>
                 <a:cs typeface="Georgia" pitchFamily="34" charset="-120"/>
               </a:rPr>
-              <a:t>Drawing time (15 min)</a:t>
+              <a:t>The magic-word story (10 min)</a:t>
             </a:r>
             <a:endParaRPr lang="en-US" sz="1800" dirty="0"/>
           </a:p>
@@ -4072,8 +3924,61 @@
         </p:nvSpPr>
         <p:spPr>
           <a:xfrm>
-            <a:off x="406301" y="870942"/>
-            <a:ext cx="8498026" cy="426541"/>
+            <a:off x="406301" y="883593"/>
+            <a:ext cx="8331398" cy="2726531"/>
+          </a:xfrm>
+          <a:prstGeom prst="rect">
+            <a:avLst/>
+          </a:prstGeom>
+          <a:solidFill>
+            <a:srgbClr val="FFFFFF"/>
+          </a:solidFill>
+          <a:ln/>
+        </p:spPr>
+        <p:txBody>
+          <a:bodyPr wrap="square" rtlCol="0" anchor="ctr"/>
+          <a:lstStyle/>
+          <a:p>
+            <a:pPr indent="0" marL="0">
+              <a:buNone/>
+            </a:pPr>
+            <a:endParaRPr lang="en-US" dirty="0"/>
+          </a:p>
+        </p:txBody>
+      </p:sp>
+      <p:sp>
+        <p:nvSpPr>
+          <p:cNvPr id="5" name="Shape 3"/>
+          <p:cNvSpPr/>
+          <p:nvPr/>
+        </p:nvSpPr>
+        <p:spPr>
+          <a:xfrm>
+            <a:off x="434876" y="883593"/>
+            <a:ext cx="0" cy="2726531"/>
+          </a:xfrm>
+          <a:prstGeom prst="line">
+            <a:avLst/>
+          </a:prstGeom>
+          <a:noFill/>
+          <a:ln w="57150">
+            <a:solidFill>
+              <a:srgbClr val="E07A5F"/>
+            </a:solidFill>
+            <a:prstDash val="solid"/>
+          </a:ln>
+        </p:spPr>
+      </p:sp>
+      <p:sp>
+        <p:nvSpPr>
+          <p:cNvPr id="6" name="Text 4"/>
+          <p:cNvSpPr/>
+          <p:nvPr/>
+        </p:nvSpPr>
+        <p:spPr>
+          <a:xfrm>
+            <a:off x="692051" y="1074093"/>
+            <a:ext cx="7973389" cy="230981"/>
           </a:xfrm>
           <a:prstGeom prst="rect">
             <a:avLst/>
@@ -4087,7 +3992,7 @@
           <a:p>
             <a:pPr algn="l" indent="0" marL="0">
               <a:lnSpc>
-                <a:spcPts val="1680"/>
+                <a:spcPts val="1820"/>
               </a:lnSpc>
               <a:spcBef>
                 <a:spcPts val="300"/>
@@ -4098,76 +4003,30 @@
               <a:buNone/>
             </a:pPr>
             <a:r>
-              <a:rPr lang="en-US" sz="1200" dirty="0">
-                <a:solidFill>
-                  <a:srgbClr val="2C2C2C"/>
-                </a:solidFill>
-                <a:latin typeface="Verdana" pitchFamily="34" charset="0"/>
-                <a:ea typeface="Verdana" pitchFamily="34" charset="-122"/>
-                <a:cs typeface="Verdana" pitchFamily="34" charset="-120"/>
-              </a:rPr>
-              <a:t>Each child draws ONE friend-pair. Above the pair, write the word </a:t>
-            </a:r>
-            <a:pPr algn="l" indent="0" marL="0">
-              <a:lnSpc>
-                <a:spcPts val="1680"/>
-              </a:lnSpc>
-              <a:spcBef>
-                <a:spcPts val="300"/>
-              </a:spcBef>
-              <a:spcAft>
-                <a:spcPts val="300"/>
-              </a:spcAft>
-              <a:buNone/>
-            </a:pPr>
-            <a:r>
-              <a:rPr lang="en-US" sz="1200" i="1" dirty="0">
-                <a:solidFill>
-                  <a:srgbClr val="2C2C2C"/>
-                </a:solidFill>
-                <a:latin typeface="Verdana" pitchFamily="34" charset="0"/>
-                <a:ea typeface="Verdana" pitchFamily="34" charset="-122"/>
-                <a:cs typeface="Verdana" pitchFamily="34" charset="-120"/>
-              </a:rPr>
-              <a:t>NIKHILAM</a:t>
-            </a:r>
-            <a:pPr algn="l" indent="0" marL="0">
-              <a:lnSpc>
-                <a:spcPts val="1680"/>
-              </a:lnSpc>
-              <a:spcBef>
-                <a:spcPts val="300"/>
-              </a:spcBef>
-              <a:spcAft>
-                <a:spcPts val="300"/>
-              </a:spcAft>
-              <a:buNone/>
-            </a:pPr>
-            <a:r>
-              <a:rPr lang="en-US" sz="1200" dirty="0">
-                <a:solidFill>
-                  <a:srgbClr val="2C2C2C"/>
-                </a:solidFill>
-                <a:latin typeface="Verdana" pitchFamily="34" charset="0"/>
-                <a:ea typeface="Verdana" pitchFamily="34" charset="-122"/>
-                <a:cs typeface="Verdana" pitchFamily="34" charset="-120"/>
-              </a:rPr>
-              <a:t> in big letters (or use the wall poster as a guide).</a:t>
-            </a:r>
-            <a:endParaRPr lang="en-US" sz="1200" dirty="0"/>
-          </a:p>
-        </p:txBody>
-      </p:sp>
-      <p:sp>
-        <p:nvSpPr>
-          <p:cNvPr id="5" name="Text 3"/>
-          <p:cNvSpPr/>
-          <p:nvPr/>
-        </p:nvSpPr>
-        <p:spPr>
-          <a:xfrm>
-            <a:off x="406301" y="1373684"/>
-            <a:ext cx="8498026" cy="426541"/>
+              <a:rPr lang="en-US" sz="1300" b="1" i="1" dirty="0">
+                <a:solidFill>
+                  <a:srgbClr val="2C2C2C"/>
+                </a:solidFill>
+                <a:latin typeface="Georgia" pitchFamily="34" charset="0"/>
+                <a:ea typeface="Georgia" pitchFamily="34" charset="-122"/>
+                <a:cs typeface="Georgia" pitchFamily="34" charset="-120"/>
+              </a:rPr>
+              <a:t>The Sanskrit Word</a:t>
+            </a:r>
+            <a:endParaRPr lang="en-US" sz="1300" dirty="0"/>
+          </a:p>
+        </p:txBody>
+      </p:sp>
+      <p:sp>
+        <p:nvSpPr>
+          <p:cNvPr id="7" name="Text 5"/>
+          <p:cNvSpPr/>
+          <p:nvPr/>
+        </p:nvSpPr>
+        <p:spPr>
+          <a:xfrm>
+            <a:off x="692051" y="1343174"/>
+            <a:ext cx="7973389" cy="230981"/>
           </a:xfrm>
           <a:prstGeom prst="rect">
             <a:avLst/>
@@ -4181,7 +4040,7 @@
           <a:p>
             <a:pPr algn="l" indent="0" marL="0">
               <a:lnSpc>
-                <a:spcPts val="1680"/>
+                <a:spcPts val="1820"/>
               </a:lnSpc>
               <a:spcBef>
                 <a:spcPts val="300"/>
@@ -4192,30 +4051,30 @@
               <a:buNone/>
             </a:pPr>
             <a:r>
-              <a:rPr lang="en-US" sz="1200" dirty="0">
-                <a:solidFill>
-                  <a:srgbClr val="2C2C2C"/>
-                </a:solidFill>
-                <a:latin typeface="Verdana" pitchFamily="34" charset="0"/>
-                <a:ea typeface="Verdana" pitchFamily="34" charset="-122"/>
-                <a:cs typeface="Verdana" pitchFamily="34" charset="-120"/>
-              </a:rPr>
-              <a:t>Examples: a pair of trees labelled "3 and 7." Two children holding hands labelled "4 and 6." Two suns labelled "5 and 5."</a:t>
-            </a:r>
-            <a:endParaRPr lang="en-US" sz="1200" dirty="0"/>
-          </a:p>
-        </p:txBody>
-      </p:sp>
-      <p:sp>
-        <p:nvSpPr>
-          <p:cNvPr id="6" name="Text 4"/>
-          <p:cNvSpPr/>
-          <p:nvPr/>
-        </p:nvSpPr>
-        <p:spPr>
-          <a:xfrm>
-            <a:off x="406301" y="1876425"/>
-            <a:ext cx="8498026" cy="213271"/>
+              <a:rPr lang="en-US" sz="1300" i="1" dirty="0">
+                <a:solidFill>
+                  <a:srgbClr val="2C2C2C"/>
+                </a:solidFill>
+                <a:latin typeface="Georgia" pitchFamily="34" charset="0"/>
+                <a:ea typeface="Georgia" pitchFamily="34" charset="-122"/>
+                <a:cs typeface="Georgia" pitchFamily="34" charset="-120"/>
+              </a:rPr>
+              <a:t>Long ago, people in India had a special name for "the friend rule." The name is a Sanskrit word.</a:t>
+            </a:r>
+            <a:endParaRPr lang="en-US" sz="1300" dirty="0"/>
+          </a:p>
+        </p:txBody>
+      </p:sp>
+      <p:sp>
+        <p:nvSpPr>
+          <p:cNvPr id="8" name="Text 6"/>
+          <p:cNvSpPr/>
+          <p:nvPr/>
+        </p:nvSpPr>
+        <p:spPr>
+          <a:xfrm>
+            <a:off x="692051" y="1612255"/>
+            <a:ext cx="7973389" cy="230981"/>
           </a:xfrm>
           <a:prstGeom prst="rect">
             <a:avLst/>
@@ -4229,7 +4088,7 @@
           <a:p>
             <a:pPr algn="l" indent="0" marL="0">
               <a:lnSpc>
-                <a:spcPts val="1680"/>
+                <a:spcPts val="1820"/>
               </a:lnSpc>
               <a:spcBef>
                 <a:spcPts val="300"/>
@@ -4240,23 +4099,401 @@
               <a:buNone/>
             </a:pPr>
             <a:r>
-              <a:rPr lang="en-US" sz="1200" dirty="0">
-                <a:solidFill>
-                  <a:srgbClr val="2C2C2C"/>
-                </a:solidFill>
-                <a:latin typeface="Verdana" pitchFamily="34" charset="0"/>
-                <a:ea typeface="Verdana" pitchFamily="34" charset="-122"/>
-                <a:cs typeface="Verdana" pitchFamily="34" charset="-120"/>
-              </a:rPr>
-              <a:t>(Teacher walks around helping with the spelling of "Nikhilam.")</a:t>
-            </a:r>
-            <a:endParaRPr lang="en-US" sz="1200" dirty="0"/>
-          </a:p>
-        </p:txBody>
-      </p:sp>
-      <p:sp>
-        <p:nvSpPr>
-          <p:cNvPr id="7" name="Text 5"/>
+              <a:rPr lang="en-US" sz="1300" i="1" dirty="0">
+                <a:solidFill>
+                  <a:srgbClr val="2C2C2C"/>
+                </a:solidFill>
+                <a:latin typeface="Georgia" pitchFamily="34" charset="0"/>
+                <a:ea typeface="Georgia" pitchFamily="34" charset="-122"/>
+                <a:cs typeface="Georgia" pitchFamily="34" charset="-120"/>
+              </a:rPr>
+              <a:t>(Pause for suspense.)</a:t>
+            </a:r>
+            <a:endParaRPr lang="en-US" sz="1300" dirty="0"/>
+          </a:p>
+        </p:txBody>
+      </p:sp>
+      <p:sp>
+        <p:nvSpPr>
+          <p:cNvPr id="9" name="Text 7"/>
+          <p:cNvSpPr/>
+          <p:nvPr/>
+        </p:nvSpPr>
+        <p:spPr>
+          <a:xfrm>
+            <a:off x="692051" y="1881336"/>
+            <a:ext cx="7973389" cy="230981"/>
+          </a:xfrm>
+          <a:prstGeom prst="rect">
+            <a:avLst/>
+          </a:prstGeom>
+          <a:noFill/>
+          <a:ln/>
+        </p:spPr>
+        <p:txBody>
+          <a:bodyPr wrap="square" lIns="0" tIns="0" rIns="0" bIns="0" rtlCol="0" anchor="t"/>
+          <a:lstStyle/>
+          <a:p>
+            <a:pPr algn="l" indent="0" marL="0">
+              <a:lnSpc>
+                <a:spcPts val="1820"/>
+              </a:lnSpc>
+              <a:spcBef>
+                <a:spcPts val="300"/>
+              </a:spcBef>
+              <a:spcAft>
+                <a:spcPts val="300"/>
+              </a:spcAft>
+              <a:buNone/>
+            </a:pPr>
+            <a:r>
+              <a:rPr lang="en-US" sz="1300" i="1" dirty="0">
+                <a:solidFill>
+                  <a:srgbClr val="2C2C2C"/>
+                </a:solidFill>
+                <a:latin typeface="Georgia" pitchFamily="34" charset="0"/>
+                <a:ea typeface="Georgia" pitchFamily="34" charset="-122"/>
+                <a:cs typeface="Georgia" pitchFamily="34" charset="-120"/>
+              </a:rPr>
+              <a:t>Are you ready?</a:t>
+            </a:r>
+            <a:endParaRPr lang="en-US" sz="1300" dirty="0"/>
+          </a:p>
+        </p:txBody>
+      </p:sp>
+      <p:sp>
+        <p:nvSpPr>
+          <p:cNvPr id="10" name="Text 8"/>
+          <p:cNvSpPr/>
+          <p:nvPr/>
+        </p:nvSpPr>
+        <p:spPr>
+          <a:xfrm>
+            <a:off x="692051" y="2150418"/>
+            <a:ext cx="7973389" cy="230981"/>
+          </a:xfrm>
+          <a:prstGeom prst="rect">
+            <a:avLst/>
+          </a:prstGeom>
+          <a:noFill/>
+          <a:ln/>
+        </p:spPr>
+        <p:txBody>
+          <a:bodyPr wrap="square" lIns="0" tIns="0" rIns="0" bIns="0" rtlCol="0" anchor="t"/>
+          <a:lstStyle/>
+          <a:p>
+            <a:pPr algn="l" indent="0" marL="0">
+              <a:lnSpc>
+                <a:spcPts val="1820"/>
+              </a:lnSpc>
+              <a:spcBef>
+                <a:spcPts val="300"/>
+              </a:spcBef>
+              <a:spcAft>
+                <a:spcPts val="300"/>
+              </a:spcAft>
+              <a:buNone/>
+            </a:pPr>
+            <a:r>
+              <a:rPr lang="en-US" sz="1300" dirty="0">
+                <a:solidFill>
+                  <a:srgbClr val="2C2C2C"/>
+                </a:solidFill>
+                <a:latin typeface="Georgia" pitchFamily="34" charset="0"/>
+                <a:ea typeface="Georgia" pitchFamily="34" charset="-122"/>
+                <a:cs typeface="Georgia" pitchFamily="34" charset="-120"/>
+              </a:rPr>
+              <a:t>The word is — </a:t>
+            </a:r>
+            <a:pPr algn="l" indent="0" marL="0">
+              <a:lnSpc>
+                <a:spcPts val="1820"/>
+              </a:lnSpc>
+              <a:spcBef>
+                <a:spcPts val="300"/>
+              </a:spcBef>
+              <a:spcAft>
+                <a:spcPts val="300"/>
+              </a:spcAft>
+              <a:buNone/>
+            </a:pPr>
+            <a:r>
+              <a:rPr lang="en-US" sz="1300" b="1" i="1" dirty="0">
+                <a:solidFill>
+                  <a:srgbClr val="2C2C2C"/>
+                </a:solidFill>
+                <a:latin typeface="Georgia" pitchFamily="34" charset="0"/>
+                <a:ea typeface="Georgia" pitchFamily="34" charset="-122"/>
+                <a:cs typeface="Georgia" pitchFamily="34" charset="-120"/>
+              </a:rPr>
+              <a:t>Nikhilam</a:t>
+            </a:r>
+            <a:pPr algn="l" indent="0" marL="0">
+              <a:lnSpc>
+                <a:spcPts val="1820"/>
+              </a:lnSpc>
+              <a:spcBef>
+                <a:spcPts val="300"/>
+              </a:spcBef>
+              <a:spcAft>
+                <a:spcPts val="300"/>
+              </a:spcAft>
+              <a:buNone/>
+            </a:pPr>
+            <a:r>
+              <a:rPr lang="en-US" sz="1300" dirty="0">
+                <a:solidFill>
+                  <a:srgbClr val="2C2C2C"/>
+                </a:solidFill>
+                <a:latin typeface="Georgia" pitchFamily="34" charset="0"/>
+                <a:ea typeface="Georgia" pitchFamily="34" charset="-122"/>
+                <a:cs typeface="Georgia" pitchFamily="34" charset="-120"/>
+              </a:rPr>
+              <a:t>! </a:t>
+            </a:r>
+            <a:pPr algn="l" indent="0" marL="0">
+              <a:lnSpc>
+                <a:spcPts val="1820"/>
+              </a:lnSpc>
+              <a:spcBef>
+                <a:spcPts val="300"/>
+              </a:spcBef>
+              <a:spcAft>
+                <a:spcPts val="300"/>
+              </a:spcAft>
+              <a:buNone/>
+            </a:pPr>
+            <a:r>
+              <a:rPr lang="en-US" sz="1300" i="1" dirty="0">
+                <a:solidFill>
+                  <a:srgbClr val="2C2C2C"/>
+                </a:solidFill>
+                <a:latin typeface="Georgia" pitchFamily="34" charset="0"/>
+                <a:ea typeface="Georgia" pitchFamily="34" charset="-122"/>
+                <a:cs typeface="Georgia" pitchFamily="34" charset="-120"/>
+              </a:rPr>
+              <a:t>(Say it slowly: ni-khi-lam.)</a:t>
+            </a:r>
+            <a:endParaRPr lang="en-US" sz="1300" dirty="0"/>
+          </a:p>
+        </p:txBody>
+      </p:sp>
+      <p:sp>
+        <p:nvSpPr>
+          <p:cNvPr id="11" name="Text 9"/>
+          <p:cNvSpPr/>
+          <p:nvPr/>
+        </p:nvSpPr>
+        <p:spPr>
+          <a:xfrm>
+            <a:off x="692051" y="2419499"/>
+            <a:ext cx="7973389" cy="230981"/>
+          </a:xfrm>
+          <a:prstGeom prst="rect">
+            <a:avLst/>
+          </a:prstGeom>
+          <a:noFill/>
+          <a:ln/>
+        </p:spPr>
+        <p:txBody>
+          <a:bodyPr wrap="square" lIns="0" tIns="0" rIns="0" bIns="0" rtlCol="0" anchor="t"/>
+          <a:lstStyle/>
+          <a:p>
+            <a:pPr algn="l" indent="0" marL="0">
+              <a:lnSpc>
+                <a:spcPts val="1820"/>
+              </a:lnSpc>
+              <a:spcBef>
+                <a:spcPts val="300"/>
+              </a:spcBef>
+              <a:spcAft>
+                <a:spcPts val="300"/>
+              </a:spcAft>
+              <a:buNone/>
+            </a:pPr>
+            <a:r>
+              <a:rPr lang="en-US" sz="1300" i="1" dirty="0">
+                <a:solidFill>
+                  <a:srgbClr val="2C2C2C"/>
+                </a:solidFill>
+                <a:latin typeface="Georgia" pitchFamily="34" charset="0"/>
+                <a:ea typeface="Georgia" pitchFamily="34" charset="-122"/>
+                <a:cs typeface="Georgia" pitchFamily="34" charset="-120"/>
+              </a:rPr>
+              <a:t>(Class echoes 3 times. Soft / normal / loud. Children find it funny — let them.)</a:t>
+            </a:r>
+            <a:endParaRPr lang="en-US" sz="1300" dirty="0"/>
+          </a:p>
+        </p:txBody>
+      </p:sp>
+      <p:sp>
+        <p:nvSpPr>
+          <p:cNvPr id="12" name="Text 10"/>
+          <p:cNvSpPr/>
+          <p:nvPr/>
+        </p:nvSpPr>
+        <p:spPr>
+          <a:xfrm>
+            <a:off x="692051" y="2688580"/>
+            <a:ext cx="7973389" cy="230981"/>
+          </a:xfrm>
+          <a:prstGeom prst="rect">
+            <a:avLst/>
+          </a:prstGeom>
+          <a:noFill/>
+          <a:ln/>
+        </p:spPr>
+        <p:txBody>
+          <a:bodyPr wrap="square" lIns="0" tIns="0" rIns="0" bIns="0" rtlCol="0" anchor="t"/>
+          <a:lstStyle/>
+          <a:p>
+            <a:pPr algn="l" indent="0" marL="0">
+              <a:lnSpc>
+                <a:spcPts val="1820"/>
+              </a:lnSpc>
+              <a:spcBef>
+                <a:spcPts val="300"/>
+              </a:spcBef>
+              <a:spcAft>
+                <a:spcPts val="300"/>
+              </a:spcAft>
+              <a:buNone/>
+            </a:pPr>
+            <a:r>
+              <a:rPr lang="en-US" sz="1300" i="1" dirty="0">
+                <a:solidFill>
+                  <a:srgbClr val="2C2C2C"/>
+                </a:solidFill>
+                <a:latin typeface="Georgia" pitchFamily="34" charset="0"/>
+                <a:ea typeface="Georgia" pitchFamily="34" charset="-122"/>
+                <a:cs typeface="Georgia" pitchFamily="34" charset="-120"/>
+              </a:rPr>
+              <a:t>Nikhilam</a:t>
+            </a:r>
+            <a:pPr algn="l" indent="0" marL="0">
+              <a:lnSpc>
+                <a:spcPts val="1820"/>
+              </a:lnSpc>
+              <a:spcBef>
+                <a:spcPts val="300"/>
+              </a:spcBef>
+              <a:spcAft>
+                <a:spcPts val="300"/>
+              </a:spcAft>
+              <a:buNone/>
+            </a:pPr>
+            <a:r>
+              <a:rPr lang="en-US" sz="1300" dirty="0">
+                <a:solidFill>
+                  <a:srgbClr val="2C2C2C"/>
+                </a:solidFill>
+                <a:latin typeface="Georgia" pitchFamily="34" charset="0"/>
+                <a:ea typeface="Georgia" pitchFamily="34" charset="-122"/>
+                <a:cs typeface="Georgia" pitchFamily="34" charset="-120"/>
+              </a:rPr>
+              <a:t> means "all of it" or "the whole." It's the secret name for our friends-to-ten rule.</a:t>
+            </a:r>
+            <a:endParaRPr lang="en-US" sz="1300" dirty="0"/>
+          </a:p>
+        </p:txBody>
+      </p:sp>
+      <p:sp>
+        <p:nvSpPr>
+          <p:cNvPr id="13" name="Text 11"/>
+          <p:cNvSpPr/>
+          <p:nvPr/>
+        </p:nvSpPr>
+        <p:spPr>
+          <a:xfrm>
+            <a:off x="692051" y="2957661"/>
+            <a:ext cx="7973389" cy="461963"/>
+          </a:xfrm>
+          <a:prstGeom prst="rect">
+            <a:avLst/>
+          </a:prstGeom>
+          <a:noFill/>
+          <a:ln/>
+        </p:spPr>
+        <p:txBody>
+          <a:bodyPr wrap="square" lIns="0" tIns="0" rIns="0" bIns="0" rtlCol="0" anchor="t"/>
+          <a:lstStyle/>
+          <a:p>
+            <a:pPr algn="l" indent="0" marL="0">
+              <a:lnSpc>
+                <a:spcPts val="1820"/>
+              </a:lnSpc>
+              <a:spcBef>
+                <a:spcPts val="300"/>
+              </a:spcBef>
+              <a:spcAft>
+                <a:spcPts val="300"/>
+              </a:spcAft>
+              <a:buNone/>
+            </a:pPr>
+            <a:r>
+              <a:rPr lang="en-US" sz="1300" dirty="0">
+                <a:solidFill>
+                  <a:srgbClr val="2C2C2C"/>
+                </a:solidFill>
+                <a:latin typeface="Georgia" pitchFamily="34" charset="0"/>
+                <a:ea typeface="Georgia" pitchFamily="34" charset="-122"/>
+                <a:cs typeface="Georgia" pitchFamily="34" charset="-120"/>
+              </a:rPr>
+              <a:t>An older book from 1965 gives this rule a fancy name. We'll learn the long name in Grade 6. For today — just say </a:t>
+            </a:r>
+            <a:pPr algn="l" indent="0" marL="0">
+              <a:lnSpc>
+                <a:spcPts val="1820"/>
+              </a:lnSpc>
+              <a:spcBef>
+                <a:spcPts val="300"/>
+              </a:spcBef>
+              <a:spcAft>
+                <a:spcPts val="300"/>
+              </a:spcAft>
+              <a:buNone/>
+            </a:pPr>
+            <a:r>
+              <a:rPr lang="en-US" sz="1300" i="1" dirty="0">
+                <a:solidFill>
+                  <a:srgbClr val="2C2C2C"/>
+                </a:solidFill>
+                <a:latin typeface="Georgia" pitchFamily="34" charset="0"/>
+                <a:ea typeface="Georgia" pitchFamily="34" charset="-122"/>
+                <a:cs typeface="Georgia" pitchFamily="34" charset="-120"/>
+              </a:rPr>
+              <a:t>Nikhilam</a:t>
+            </a:r>
+            <a:pPr algn="l" indent="0" marL="0">
+              <a:lnSpc>
+                <a:spcPts val="1820"/>
+              </a:lnSpc>
+              <a:spcBef>
+                <a:spcPts val="300"/>
+              </a:spcBef>
+              <a:spcAft>
+                <a:spcPts val="300"/>
+              </a:spcAft>
+              <a:buNone/>
+            </a:pPr>
+            <a:r>
+              <a:rPr lang="en-US" sz="1300" dirty="0">
+                <a:solidFill>
+                  <a:srgbClr val="2C2C2C"/>
+                </a:solidFill>
+                <a:latin typeface="Georgia" pitchFamily="34" charset="0"/>
+                <a:ea typeface="Georgia" pitchFamily="34" charset="-122"/>
+                <a:cs typeface="Georgia" pitchFamily="34" charset="-120"/>
+              </a:rPr>
+              <a:t>. The friend rule. The whole. All of it.</a:t>
+            </a:r>
+            <a:endParaRPr lang="en-US" sz="1300" dirty="0"/>
+          </a:p>
+        </p:txBody>
+      </p:sp>
+      <p:sp>
+        <p:nvSpPr>
+          <p:cNvPr id="14" name="Text 12"/>
           <p:cNvSpPr/>
           <p:nvPr/>
         </p:nvSpPr>
@@ -4406,7 +4643,7 @@
                 <a:ea typeface="Georgia" pitchFamily="34" charset="-122"/>
                 <a:cs typeface="Georgia" pitchFamily="34" charset="-120"/>
               </a:rPr>
-              <a:t>Sharing (5 min)</a:t>
+              <a:t>Drawing time (15 min)</a:t>
             </a:r>
             <a:endParaRPr lang="en-US" sz="1800" dirty="0"/>
           </a:p>
@@ -4421,7 +4658,7 @@
         <p:spPr>
           <a:xfrm>
             <a:off x="406301" y="870942"/>
-            <a:ext cx="8498026" cy="213271"/>
+            <a:ext cx="8498026" cy="426541"/>
           </a:xfrm>
           <a:prstGeom prst="rect">
             <a:avLst/>
@@ -4454,7 +4691,7 @@
                 <a:ea typeface="Verdana" pitchFamily="34" charset="-122"/>
                 <a:cs typeface="Verdana" pitchFamily="34" charset="-120"/>
               </a:rPr>
-              <a:t>3 children hold up their drawings. Class chorus the friend-pair AND chants </a:t>
+              <a:t>Each child draws ONE friend-pair. Above the pair, write the word </a:t>
             </a:r>
             <a:pPr algn="l" indent="0" marL="0">
               <a:lnSpc>
@@ -4477,7 +4714,7 @@
                 <a:ea typeface="Verdana" pitchFamily="34" charset="-122"/>
                 <a:cs typeface="Verdana" pitchFamily="34" charset="-120"/>
               </a:rPr>
-              <a:t>Nikhilam</a:t>
+              <a:t>NIKHILAM</a:t>
             </a:r>
             <a:pPr algn="l" indent="0" marL="0">
               <a:lnSpc>
@@ -4500,7 +4737,7 @@
                 <a:ea typeface="Verdana" pitchFamily="34" charset="-122"/>
                 <a:cs typeface="Verdana" pitchFamily="34" charset="-120"/>
               </a:rPr>
-              <a:t> together.</a:t>
+              <a:t> in big letters (or use the wall poster as a guide).</a:t>
             </a:r>
             <a:endParaRPr lang="en-US" sz="1200" dirty="0"/>
           </a:p>
@@ -4514,8 +4751,8 @@
         </p:nvSpPr>
         <p:spPr>
           <a:xfrm>
-            <a:off x="406301" y="1160413"/>
-            <a:ext cx="8498026" cy="213271"/>
+            <a:off x="406301" y="1373684"/>
+            <a:ext cx="8498026" cy="426541"/>
           </a:xfrm>
           <a:prstGeom prst="rect">
             <a:avLst/>
@@ -4548,8 +4785,33 @@
                 <a:ea typeface="Verdana" pitchFamily="34" charset="-122"/>
                 <a:cs typeface="Verdana" pitchFamily="34" charset="-120"/>
               </a:rPr>
-              <a:t>End with the daily chant + one big "</a:t>
-            </a:r>
+              <a:t>Examples: a pair of trees labelled "3 and 7." Two children holding hands labelled "4 and 6." Two suns labelled "5 and 5."</a:t>
+            </a:r>
+            <a:endParaRPr lang="en-US" sz="1200" dirty="0"/>
+          </a:p>
+        </p:txBody>
+      </p:sp>
+      <p:sp>
+        <p:nvSpPr>
+          <p:cNvPr id="6" name="Text 4"/>
+          <p:cNvSpPr/>
+          <p:nvPr/>
+        </p:nvSpPr>
+        <p:spPr>
+          <a:xfrm>
+            <a:off x="406301" y="1876425"/>
+            <a:ext cx="8498026" cy="213271"/>
+          </a:xfrm>
+          <a:prstGeom prst="rect">
+            <a:avLst/>
+          </a:prstGeom>
+          <a:noFill/>
+          <a:ln/>
+        </p:spPr>
+        <p:txBody>
+          <a:bodyPr wrap="square" lIns="0" tIns="0" rIns="0" bIns="0" rtlCol="0" anchor="t"/>
+          <a:lstStyle/>
+          <a:p>
             <a:pPr algn="l" indent="0" marL="0">
               <a:lnSpc>
                 <a:spcPts val="1680"/>
@@ -4563,7 +4825,7 @@
               <a:buNone/>
             </a:pPr>
             <a:r>
-              <a:rPr lang="en-US" sz="1200" i="1" dirty="0">
+              <a:rPr lang="en-US" sz="1200" dirty="0">
                 <a:solidFill>
                   <a:srgbClr val="2C2C2C"/>
                 </a:solidFill>
@@ -4571,30 +4833,7 @@
                 <a:ea typeface="Verdana" pitchFamily="34" charset="-122"/>
                 <a:cs typeface="Verdana" pitchFamily="34" charset="-120"/>
               </a:rPr>
-              <a:t>NIKHILAM!</a:t>
-            </a:r>
-            <a:pPr algn="l" indent="0" marL="0">
-              <a:lnSpc>
-                <a:spcPts val="1680"/>
-              </a:lnSpc>
-              <a:spcBef>
-                <a:spcPts val="300"/>
-              </a:spcBef>
-              <a:spcAft>
-                <a:spcPts val="300"/>
-              </a:spcAft>
-              <a:buNone/>
-            </a:pPr>
-            <a:r>
-              <a:rPr lang="en-US" sz="1200" dirty="0">
-                <a:solidFill>
-                  <a:srgbClr val="2C2C2C"/>
-                </a:solidFill>
-                <a:latin typeface="Verdana" pitchFamily="34" charset="0"/>
-                <a:ea typeface="Verdana" pitchFamily="34" charset="-122"/>
-                <a:cs typeface="Verdana" pitchFamily="34" charset="-120"/>
-              </a:rPr>
-              <a:t>"</a:t>
+              <a:t>(Teacher walks around helping with the spelling of "Nikhilam.")</a:t>
             </a:r>
             <a:endParaRPr lang="en-US" sz="1200" dirty="0"/>
           </a:p>
@@ -4602,7 +4841,7 @@
       </p:sp>
       <p:sp>
         <p:nvSpPr>
-          <p:cNvPr id="6" name="Text 4"/>
+          <p:cNvPr id="7" name="Text 5"/>
           <p:cNvSpPr/>
           <p:nvPr/>
         </p:nvSpPr>
@@ -4752,7 +4991,7 @@
                 <a:ea typeface="Georgia" pitchFamily="34" charset="-122"/>
                 <a:cs typeface="Georgia" pitchFamily="34" charset="-120"/>
               </a:rPr>
-              <a:t>Homework / take-home</a:t>
+              <a:t>Sharing (5 min)</a:t>
             </a:r>
             <a:endParaRPr lang="en-US" sz="1800" dirty="0"/>
           </a:p>
@@ -4800,7 +5039,7 @@
                 <a:ea typeface="Verdana" pitchFamily="34" charset="-122"/>
                 <a:cs typeface="Verdana" pitchFamily="34" charset="-120"/>
               </a:rPr>
-              <a:t>– Tell a parent the magic word: </a:t>
+              <a:t>3 children hold up their drawings. Class chorus the friend-pair AND chants </a:t>
             </a:r>
             <a:pPr algn="l" indent="0" marL="0">
               <a:lnSpc>
@@ -4823,7 +5062,7 @@
                 <a:ea typeface="Verdana" pitchFamily="34" charset="-122"/>
                 <a:cs typeface="Verdana" pitchFamily="34" charset="-120"/>
               </a:rPr>
-              <a:t>Nikhilam.</a:t>
+              <a:t>Nikhilam</a:t>
             </a:r>
             <a:pPr algn="l" indent="0" marL="0">
               <a:lnSpc>
@@ -4846,7 +5085,7 @@
                 <a:ea typeface="Verdana" pitchFamily="34" charset="-122"/>
                 <a:cs typeface="Verdana" pitchFamily="34" charset="-120"/>
               </a:rPr>
-              <a:t> Say it 5 times. Win their amazement.</a:t>
+              <a:t> together.</a:t>
             </a:r>
             <a:endParaRPr lang="en-US" sz="1200" dirty="0"/>
           </a:p>
@@ -4855,6 +5094,100 @@
       <p:sp>
         <p:nvSpPr>
           <p:cNvPr id="5" name="Text 3"/>
+          <p:cNvSpPr/>
+          <p:nvPr/>
+        </p:nvSpPr>
+        <p:spPr>
+          <a:xfrm>
+            <a:off x="406301" y="1160413"/>
+            <a:ext cx="8498026" cy="213271"/>
+          </a:xfrm>
+          <a:prstGeom prst="rect">
+            <a:avLst/>
+          </a:prstGeom>
+          <a:noFill/>
+          <a:ln/>
+        </p:spPr>
+        <p:txBody>
+          <a:bodyPr wrap="square" lIns="0" tIns="0" rIns="0" bIns="0" rtlCol="0" anchor="t"/>
+          <a:lstStyle/>
+          <a:p>
+            <a:pPr algn="l" indent="0" marL="0">
+              <a:lnSpc>
+                <a:spcPts val="1680"/>
+              </a:lnSpc>
+              <a:spcBef>
+                <a:spcPts val="300"/>
+              </a:spcBef>
+              <a:spcAft>
+                <a:spcPts val="300"/>
+              </a:spcAft>
+              <a:buNone/>
+            </a:pPr>
+            <a:r>
+              <a:rPr lang="en-US" sz="1200" dirty="0">
+                <a:solidFill>
+                  <a:srgbClr val="2C2C2C"/>
+                </a:solidFill>
+                <a:latin typeface="Verdana" pitchFamily="34" charset="0"/>
+                <a:ea typeface="Verdana" pitchFamily="34" charset="-122"/>
+                <a:cs typeface="Verdana" pitchFamily="34" charset="-120"/>
+              </a:rPr>
+              <a:t>End with the daily chant + one big "</a:t>
+            </a:r>
+            <a:pPr algn="l" indent="0" marL="0">
+              <a:lnSpc>
+                <a:spcPts val="1680"/>
+              </a:lnSpc>
+              <a:spcBef>
+                <a:spcPts val="300"/>
+              </a:spcBef>
+              <a:spcAft>
+                <a:spcPts val="300"/>
+              </a:spcAft>
+              <a:buNone/>
+            </a:pPr>
+            <a:r>
+              <a:rPr lang="en-US" sz="1200" i="1" dirty="0">
+                <a:solidFill>
+                  <a:srgbClr val="2C2C2C"/>
+                </a:solidFill>
+                <a:latin typeface="Verdana" pitchFamily="34" charset="0"/>
+                <a:ea typeface="Verdana" pitchFamily="34" charset="-122"/>
+                <a:cs typeface="Verdana" pitchFamily="34" charset="-120"/>
+              </a:rPr>
+              <a:t>NIKHILAM!</a:t>
+            </a:r>
+            <a:pPr algn="l" indent="0" marL="0">
+              <a:lnSpc>
+                <a:spcPts val="1680"/>
+              </a:lnSpc>
+              <a:spcBef>
+                <a:spcPts val="300"/>
+              </a:spcBef>
+              <a:spcAft>
+                <a:spcPts val="300"/>
+              </a:spcAft>
+              <a:buNone/>
+            </a:pPr>
+            <a:r>
+              <a:rPr lang="en-US" sz="1200" dirty="0">
+                <a:solidFill>
+                  <a:srgbClr val="2C2C2C"/>
+                </a:solidFill>
+                <a:latin typeface="Verdana" pitchFamily="34" charset="0"/>
+                <a:ea typeface="Verdana" pitchFamily="34" charset="-122"/>
+                <a:cs typeface="Verdana" pitchFamily="34" charset="-120"/>
+              </a:rPr>
+              <a:t>"</a:t>
+            </a:r>
+            <a:endParaRPr lang="en-US" sz="1200" dirty="0"/>
+          </a:p>
+        </p:txBody>
+      </p:sp>
+      <p:sp>
+        <p:nvSpPr>
+          <p:cNvPr id="6" name="Text 4"/>
           <p:cNvSpPr/>
           <p:nvPr/>
         </p:nvSpPr>
@@ -5004,7 +5337,7 @@
                 <a:ea typeface="Georgia" pitchFamily="34" charset="-122"/>
                 <a:cs typeface="Georgia" pitchFamily="34" charset="-120"/>
               </a:rPr>
-              <a:t>Differentiation</a:t>
+              <a:t>Homework / take-home</a:t>
             </a:r>
             <a:endParaRPr lang="en-US" sz="1800" dirty="0"/>
           </a:p>
@@ -5019,7 +5352,7 @@
         <p:spPr>
           <a:xfrm>
             <a:off x="634901" y="883593"/>
-            <a:ext cx="8102798" cy="525661"/>
+            <a:ext cx="8102798" cy="281880"/>
           </a:xfrm>
           <a:prstGeom prst="rect">
             <a:avLst/>
@@ -5042,7 +5375,7 @@
               <a:buChar char="•"/>
             </a:pPr>
             <a:r>
-              <a:rPr lang="en-US" sz="1200" b="1" dirty="0">
+              <a:rPr lang="en-US" sz="1200" dirty="0">
                 <a:solidFill>
                   <a:srgbClr val="2C2C2C"/>
                 </a:solidFill>
@@ -5050,7 +5383,7 @@
                 <a:ea typeface="Verdana" pitchFamily="34" charset="-122"/>
                 <a:cs typeface="Verdana" pitchFamily="34" charset="-120"/>
               </a:rPr>
-              <a:t>Tier up:</a:t>
+              <a:t>Tell a parent the magic word: </a:t>
             </a:r>
             <a:pPr algn="l" indent="0" marL="0">
               <a:lnSpc>
@@ -5062,7 +5395,7 @@
               <a:buNone/>
             </a:pPr>
             <a:r>
-              <a:rPr lang="en-US" sz="1200" dirty="0">
+              <a:rPr lang="en-US" sz="1200" i="1" dirty="0">
                 <a:solidFill>
                   <a:srgbClr val="2C2C2C"/>
                 </a:solidFill>
@@ -5070,7 +5403,7 @@
                 <a:ea typeface="Verdana" pitchFamily="34" charset="-122"/>
                 <a:cs typeface="Verdana" pitchFamily="34" charset="-120"/>
               </a:rPr>
-              <a:t> Try to write </a:t>
+              <a:t>Nikhilam.</a:t>
             </a:r>
             <a:pPr algn="l" indent="0" marL="0">
               <a:lnSpc>
@@ -5082,7 +5415,7 @@
               <a:buNone/>
             </a:pPr>
             <a:r>
-              <a:rPr lang="en-US" sz="1200" i="1" dirty="0">
+              <a:rPr lang="en-US" sz="1200" dirty="0">
                 <a:solidFill>
                   <a:srgbClr val="2C2C2C"/>
                 </a:solidFill>
@@ -5090,71 +5423,7 @@
                 <a:ea typeface="Verdana" pitchFamily="34" charset="-122"/>
                 <a:cs typeface="Verdana" pitchFamily="34" charset="-120"/>
               </a:rPr>
-              <a:t>Nikhilam</a:t>
-            </a:r>
-            <a:pPr algn="l" indent="0" marL="0">
-              <a:lnSpc>
-                <a:spcPts val="1620"/>
-              </a:lnSpc>
-              <a:spcAft>
-                <a:spcPts val="300"/>
-              </a:spcAft>
-              <a:buNone/>
-            </a:pPr>
-            <a:r>
-              <a:rPr lang="en-US" sz="1200" dirty="0">
-                <a:solidFill>
-                  <a:srgbClr val="2C2C2C"/>
-                </a:solidFill>
-                <a:latin typeface="Verdana" pitchFamily="34" charset="0"/>
-                <a:ea typeface="Verdana" pitchFamily="34" charset="-122"/>
-                <a:cs typeface="Verdana" pitchFamily="34" charset="-120"/>
-              </a:rPr>
-              <a:t> in Devanāgarī (निखिलं). Provide a print-out card.</a:t>
-            </a:r>
-            <a:endParaRPr lang="en-US" sz="1200" dirty="0"/>
-          </a:p>
-          <a:p>
-            <a:pPr algn="l" marL="342900" indent="-342900">
-              <a:lnSpc>
-                <a:spcPts val="1620"/>
-              </a:lnSpc>
-              <a:spcAft>
-                <a:spcPts val="300"/>
-              </a:spcAft>
-              <a:buSzPct val="100000"/>
-              <a:buChar char="•"/>
-            </a:pPr>
-            <a:r>
-              <a:rPr lang="en-US" sz="1200" b="1" dirty="0">
-                <a:solidFill>
-                  <a:srgbClr val="2C2C2C"/>
-                </a:solidFill>
-                <a:latin typeface="Verdana" pitchFamily="34" charset="0"/>
-                <a:ea typeface="Verdana" pitchFamily="34" charset="-122"/>
-                <a:cs typeface="Verdana" pitchFamily="34" charset="-120"/>
-              </a:rPr>
-              <a:t>Tier down:</a:t>
-            </a:r>
-            <a:pPr algn="l" indent="0" marL="0">
-              <a:lnSpc>
-                <a:spcPts val="1620"/>
-              </a:lnSpc>
-              <a:spcAft>
-                <a:spcPts val="300"/>
-              </a:spcAft>
-              <a:buNone/>
-            </a:pPr>
-            <a:r>
-              <a:rPr lang="en-US" sz="1200" dirty="0">
-                <a:solidFill>
-                  <a:srgbClr val="2C2C2C"/>
-                </a:solidFill>
-                <a:latin typeface="Verdana" pitchFamily="34" charset="0"/>
-                <a:ea typeface="Verdana" pitchFamily="34" charset="-122"/>
-                <a:cs typeface="Verdana" pitchFamily="34" charset="-120"/>
-              </a:rPr>
-              <a:t> Just say the word. Drawing is optional.</a:t>
+              <a:t> Say it 5 times. Win their amazement.</a:t>
             </a:r>
             <a:endParaRPr lang="en-US" sz="1200" dirty="0"/>
           </a:p>
